--- a/Lecture Notes New/UNIT 1.pptx
+++ b/Lecture Notes New/UNIT 1.pptx
@@ -81,45 +81,45 @@
       <p:boldItalic r:id="rId65"/>
     </p:embeddedFont>
     <p:embeddedFont>
-      <p:font typeface="Corbel" panose="020B0503020204020204" pitchFamily="34" charset="0"/>
+      <p:font typeface="Calibri" panose="020F0502020204030204" pitchFamily="34" charset="0"/>
       <p:regular r:id="rId66"/>
       <p:bold r:id="rId67"/>
       <p:italic r:id="rId68"/>
       <p:boldItalic r:id="rId69"/>
     </p:embeddedFont>
     <p:embeddedFont>
-      <p:font typeface="Trebuchet MS" panose="020B0603020202020204" pitchFamily="34" charset="0"/>
+      <p:font typeface="Corbel" panose="020B0503020204020204" pitchFamily="34" charset="0"/>
       <p:regular r:id="rId70"/>
       <p:bold r:id="rId71"/>
       <p:italic r:id="rId72"/>
       <p:boldItalic r:id="rId73"/>
     </p:embeddedFont>
     <p:embeddedFont>
-      <p:font typeface="Proxima Nova" panose="020B0604020202020204" charset="0"/>
+      <p:font typeface="Cambria Math" panose="02040503050406030204" pitchFamily="18" charset="0"/>
       <p:regular r:id="rId74"/>
-      <p:bold r:id="rId75"/>
-      <p:italic r:id="rId76"/>
-      <p:boldItalic r:id="rId77"/>
     </p:embeddedFont>
     <p:embeddedFont>
       <p:font typeface="Calibri Light" panose="020F0302020204030204" pitchFamily="34" charset="0"/>
-      <p:regular r:id="rId78"/>
+      <p:regular r:id="rId75"/>
+      <p:italic r:id="rId76"/>
+    </p:embeddedFont>
+    <p:embeddedFont>
+      <p:font typeface="Trebuchet MS" panose="020B0603020202020204" pitchFamily="34" charset="0"/>
+      <p:regular r:id="rId77"/>
+      <p:bold r:id="rId78"/>
       <p:italic r:id="rId79"/>
+      <p:boldItalic r:id="rId80"/>
     </p:embeddedFont>
     <p:embeddedFont>
       <p:font typeface="Algerian" panose="04020705040A02060702" pitchFamily="82" charset="0"/>
-      <p:regular r:id="rId80"/>
+      <p:regular r:id="rId81"/>
     </p:embeddedFont>
     <p:embeddedFont>
-      <p:font typeface="Calibri" panose="020F0502020204030204" pitchFamily="34" charset="0"/>
-      <p:regular r:id="rId81"/>
-      <p:bold r:id="rId82"/>
-      <p:italic r:id="rId83"/>
-      <p:boldItalic r:id="rId84"/>
-    </p:embeddedFont>
-    <p:embeddedFont>
-      <p:font typeface="Cambria Math" panose="02040503050406030204" pitchFamily="18" charset="0"/>
-      <p:regular r:id="rId85"/>
+      <p:font typeface="Proxima Nova" panose="020B0604020202020204" charset="0"/>
+      <p:regular r:id="rId82"/>
+      <p:bold r:id="rId83"/>
+      <p:italic r:id="rId84"/>
+      <p:boldItalic r:id="rId85"/>
     </p:embeddedFont>
   </p:embeddedFontLst>
   <p:defaultTextStyle>
@@ -455,7 +455,7 @@
           <a:p>
             <a:fld id="{2D48783D-DF34-49FA-B782-4B7FE0520117}" type="datetimeFigureOut">
               <a:rPr lang="en-IN" smtClean="0"/>
-              <a:t>07-08-2023</a:t>
+              <a:t>27-06-2026</a:t>
             </a:fld>
             <a:endParaRPr lang="en-IN"/>
           </a:p>
@@ -11052,7 +11052,7 @@
         </p:blipFill>
         <p:spPr>
           <a:xfrm>
-            <a:off x="4762" y="-9545"/>
+            <a:off x="0" y="-47091"/>
             <a:ext cx="9134475" cy="5133975"/>
           </a:xfrm>
           <a:prstGeom prst="rect">
@@ -11133,131 +11133,6 @@
       </p:sp>
       <p:sp>
         <p:nvSpPr>
-          <p:cNvPr id="12" name="Google Shape;73;p15"/>
-          <p:cNvSpPr txBox="1"/>
-          <p:nvPr/>
-        </p:nvSpPr>
-        <p:spPr>
-          <a:xfrm>
-            <a:off x="333811" y="3776446"/>
-            <a:ext cx="4030925" cy="1292631"/>
-          </a:xfrm>
-          <a:prstGeom prst="rect">
-            <a:avLst/>
-          </a:prstGeom>
-          <a:noFill/>
-          <a:ln>
-            <a:noFill/>
-          </a:ln>
-        </p:spPr>
-        <p:txBody>
-          <a:bodyPr spcFirstLastPara="1" wrap="square" lIns="91425" tIns="91425" rIns="91425" bIns="91425" anchor="t" anchorCtr="0">
-            <a:spAutoFit/>
-          </a:bodyPr>
-          <a:lstStyle/>
-          <a:p>
-            <a:pPr lvl="0">
-              <a:lnSpc>
-                <a:spcPct val="150000"/>
-              </a:lnSpc>
-            </a:pPr>
-            <a:r>
-              <a:rPr lang="en-US" sz="1600" b="1" dirty="0" smtClean="0">
-                <a:solidFill>
-                  <a:schemeClr val="tx1"/>
-                </a:solidFill>
-                <a:latin typeface="Trebuchet MS" panose="020B0603020202020204" pitchFamily="34" charset="0"/>
-              </a:rPr>
-              <a:t>Prepared by</a:t>
-            </a:r>
-          </a:p>
-          <a:p>
-            <a:pPr lvl="0">
-              <a:lnSpc>
-                <a:spcPct val="150000"/>
-              </a:lnSpc>
-            </a:pPr>
-            <a:r>
-              <a:rPr lang="en-US" sz="1600" b="1" dirty="0" smtClean="0">
-                <a:solidFill>
-                  <a:schemeClr val="tx1"/>
-                </a:solidFill>
-                <a:latin typeface="Trebuchet MS" panose="020B0603020202020204" pitchFamily="34" charset="0"/>
-              </a:rPr>
-              <a:t>Prof</a:t>
-            </a:r>
-            <a:r>
-              <a:rPr lang="en-US" sz="1600" b="1" dirty="0">
-                <a:solidFill>
-                  <a:schemeClr val="tx1"/>
-                </a:solidFill>
-                <a:latin typeface="Trebuchet MS" panose="020B0603020202020204" pitchFamily="34" charset="0"/>
-              </a:rPr>
-              <a:t>. </a:t>
-            </a:r>
-            <a:r>
-              <a:rPr lang="en-US" sz="1600" b="1" dirty="0" err="1">
-                <a:solidFill>
-                  <a:schemeClr val="tx1"/>
-                </a:solidFill>
-                <a:latin typeface="Trebuchet MS" panose="020B0603020202020204" pitchFamily="34" charset="0"/>
-              </a:rPr>
-              <a:t>Premavathi</a:t>
-            </a:r>
-            <a:r>
-              <a:rPr lang="en-US" sz="1600" b="1" dirty="0">
-                <a:solidFill>
-                  <a:schemeClr val="tx1"/>
-                </a:solidFill>
-                <a:latin typeface="Trebuchet MS" panose="020B0603020202020204" pitchFamily="34" charset="0"/>
-              </a:rPr>
-              <a:t> </a:t>
-            </a:r>
-            <a:r>
-              <a:rPr lang="en-US" sz="1600" b="1" dirty="0" smtClean="0">
-                <a:solidFill>
-                  <a:schemeClr val="tx1"/>
-                </a:solidFill>
-                <a:latin typeface="Trebuchet MS" panose="020B0603020202020204" pitchFamily="34" charset="0"/>
-              </a:rPr>
-              <a:t>T, </a:t>
-            </a:r>
-          </a:p>
-          <a:p>
-            <a:pPr lvl="0">
-              <a:lnSpc>
-                <a:spcPct val="150000"/>
-              </a:lnSpc>
-            </a:pPr>
-            <a:r>
-              <a:rPr lang="en-US" sz="1600" b="1" dirty="0" smtClean="0">
-                <a:solidFill>
-                  <a:schemeClr val="tx1"/>
-                </a:solidFill>
-                <a:latin typeface="Trebuchet MS" panose="020B0603020202020204" pitchFamily="34" charset="0"/>
-              </a:rPr>
-              <a:t>Department </a:t>
-            </a:r>
-            <a:r>
-              <a:rPr lang="en-US" sz="1600" b="1" dirty="0">
-                <a:solidFill>
-                  <a:schemeClr val="tx1"/>
-                </a:solidFill>
-                <a:latin typeface="Trebuchet MS" panose="020B0603020202020204" pitchFamily="34" charset="0"/>
-              </a:rPr>
-              <a:t>of CE- AI </a:t>
-            </a:r>
-            <a:endParaRPr sz="1600" b="1" dirty="0">
-              <a:solidFill>
-                <a:schemeClr val="tx1"/>
-              </a:solidFill>
-              <a:latin typeface="Trebuchet MS" panose="020B0603020202020204" pitchFamily="34" charset="0"/>
-            </a:endParaRPr>
-          </a:p>
-        </p:txBody>
-      </p:sp>
-      <p:sp>
-        <p:nvSpPr>
           <p:cNvPr id="13" name="Google Shape;71;p15"/>
           <p:cNvSpPr txBox="1"/>
           <p:nvPr/>
@@ -11352,6 +11227,312 @@
           </a:prstGeom>
         </p:spPr>
       </p:pic>
+      <p:sp>
+        <p:nvSpPr>
+          <p:cNvPr id="8" name="Google Shape;73;p15"/>
+          <p:cNvSpPr txBox="1"/>
+          <p:nvPr/>
+        </p:nvSpPr>
+        <p:spPr>
+          <a:xfrm>
+            <a:off x="333811" y="3108339"/>
+            <a:ext cx="3825165" cy="1631175"/>
+          </a:xfrm>
+          <a:prstGeom prst="rect">
+            <a:avLst/>
+          </a:prstGeom>
+          <a:noFill/>
+          <a:ln>
+            <a:noFill/>
+          </a:ln>
+        </p:spPr>
+        <p:txBody>
+          <a:bodyPr spcFirstLastPara="1" wrap="square" lIns="121900" tIns="121900" rIns="121900" bIns="121900" anchor="t" anchorCtr="0">
+            <a:spAutoFit/>
+          </a:bodyPr>
+          <a:lstStyle>
+            <a:defPPr>
+              <a:defRPr lang="en-US"/>
+            </a:defPPr>
+            <a:lvl1pPr marL="0" algn="l" defTabSz="914400" rtl="0" eaLnBrk="1" latinLnBrk="0" hangingPunct="1">
+              <a:defRPr sz="1800" kern="1200">
+                <a:solidFill>
+                  <a:schemeClr val="tx1"/>
+                </a:solidFill>
+                <a:latin typeface="+mn-lt"/>
+                <a:ea typeface="+mn-ea"/>
+                <a:cs typeface="+mn-cs"/>
+              </a:defRPr>
+            </a:lvl1pPr>
+            <a:lvl2pPr marL="457200" algn="l" defTabSz="914400" rtl="0" eaLnBrk="1" latinLnBrk="0" hangingPunct="1">
+              <a:defRPr sz="1800" kern="1200">
+                <a:solidFill>
+                  <a:schemeClr val="tx1"/>
+                </a:solidFill>
+                <a:latin typeface="+mn-lt"/>
+                <a:ea typeface="+mn-ea"/>
+                <a:cs typeface="+mn-cs"/>
+              </a:defRPr>
+            </a:lvl2pPr>
+            <a:lvl3pPr marL="914400" algn="l" defTabSz="914400" rtl="0" eaLnBrk="1" latinLnBrk="0" hangingPunct="1">
+              <a:defRPr sz="1800" kern="1200">
+                <a:solidFill>
+                  <a:schemeClr val="tx1"/>
+                </a:solidFill>
+                <a:latin typeface="+mn-lt"/>
+                <a:ea typeface="+mn-ea"/>
+                <a:cs typeface="+mn-cs"/>
+              </a:defRPr>
+            </a:lvl3pPr>
+            <a:lvl4pPr marL="1371600" algn="l" defTabSz="914400" rtl="0" eaLnBrk="1" latinLnBrk="0" hangingPunct="1">
+              <a:defRPr sz="1800" kern="1200">
+                <a:solidFill>
+                  <a:schemeClr val="tx1"/>
+                </a:solidFill>
+                <a:latin typeface="+mn-lt"/>
+                <a:ea typeface="+mn-ea"/>
+                <a:cs typeface="+mn-cs"/>
+              </a:defRPr>
+            </a:lvl4pPr>
+            <a:lvl5pPr marL="1828800" algn="l" defTabSz="914400" rtl="0" eaLnBrk="1" latinLnBrk="0" hangingPunct="1">
+              <a:defRPr sz="1800" kern="1200">
+                <a:solidFill>
+                  <a:schemeClr val="tx1"/>
+                </a:solidFill>
+                <a:latin typeface="+mn-lt"/>
+                <a:ea typeface="+mn-ea"/>
+                <a:cs typeface="+mn-cs"/>
+              </a:defRPr>
+            </a:lvl5pPr>
+            <a:lvl6pPr marL="2286000" algn="l" defTabSz="914400" rtl="0" eaLnBrk="1" latinLnBrk="0" hangingPunct="1">
+              <a:defRPr sz="1800" kern="1200">
+                <a:solidFill>
+                  <a:schemeClr val="tx1"/>
+                </a:solidFill>
+                <a:latin typeface="+mn-lt"/>
+                <a:ea typeface="+mn-ea"/>
+                <a:cs typeface="+mn-cs"/>
+              </a:defRPr>
+            </a:lvl6pPr>
+            <a:lvl7pPr marL="2743200" algn="l" defTabSz="914400" rtl="0" eaLnBrk="1" latinLnBrk="0" hangingPunct="1">
+              <a:defRPr sz="1800" kern="1200">
+                <a:solidFill>
+                  <a:schemeClr val="tx1"/>
+                </a:solidFill>
+                <a:latin typeface="+mn-lt"/>
+                <a:ea typeface="+mn-ea"/>
+                <a:cs typeface="+mn-cs"/>
+              </a:defRPr>
+            </a:lvl7pPr>
+            <a:lvl8pPr marL="3200400" algn="l" defTabSz="914400" rtl="0" eaLnBrk="1" latinLnBrk="0" hangingPunct="1">
+              <a:defRPr sz="1800" kern="1200">
+                <a:solidFill>
+                  <a:schemeClr val="tx1"/>
+                </a:solidFill>
+                <a:latin typeface="+mn-lt"/>
+                <a:ea typeface="+mn-ea"/>
+                <a:cs typeface="+mn-cs"/>
+              </a:defRPr>
+            </a:lvl8pPr>
+            <a:lvl9pPr marL="3657600" algn="l" defTabSz="914400" rtl="0" eaLnBrk="1" latinLnBrk="0" hangingPunct="1">
+              <a:defRPr sz="1800" kern="1200">
+                <a:solidFill>
+                  <a:schemeClr val="tx1"/>
+                </a:solidFill>
+                <a:latin typeface="+mn-lt"/>
+                <a:ea typeface="+mn-ea"/>
+                <a:cs typeface="+mn-cs"/>
+              </a:defRPr>
+            </a:lvl9pPr>
+          </a:lstStyle>
+          <a:p>
+            <a:pPr defTabSz="1219170">
+              <a:spcBef>
+                <a:spcPts val="600"/>
+              </a:spcBef>
+              <a:spcAft>
+                <a:spcPts val="600"/>
+              </a:spcAft>
+              <a:buClr>
+                <a:srgbClr val="000000"/>
+              </a:buClr>
+              <a:defRPr/>
+            </a:pPr>
+            <a:r>
+              <a:rPr lang="en-US" sz="2000" b="1" dirty="0">
+                <a:latin typeface="Trebuchet MS" panose="020B0603020202020204" pitchFamily="34" charset="0"/>
+              </a:rPr>
+              <a:t>Prepared by</a:t>
+            </a:r>
+          </a:p>
+          <a:p>
+            <a:pPr marL="0" marR="0" lvl="0" indent="0" algn="l" defTabSz="1219170" rtl="0" eaLnBrk="1" fontAlgn="auto" latinLnBrk="0" hangingPunct="1">
+              <a:lnSpc>
+                <a:spcPct val="100000"/>
+              </a:lnSpc>
+              <a:spcBef>
+                <a:spcPts val="600"/>
+              </a:spcBef>
+              <a:spcAft>
+                <a:spcPts val="600"/>
+              </a:spcAft>
+              <a:buClr>
+                <a:srgbClr val="000000"/>
+              </a:buClr>
+              <a:buSzTx/>
+              <a:buFontTx/>
+              <a:buNone/>
+              <a:tabLst/>
+              <a:defRPr/>
+            </a:pPr>
+            <a:r>
+              <a:rPr kumimoji="0" lang="en-US" sz="2000" b="1" i="0" u="none" strike="noStrike" kern="0" cap="none" spc="0" normalizeH="0" baseline="0" noProof="0" dirty="0" smtClean="0">
+                <a:ln>
+                  <a:noFill/>
+                </a:ln>
+                <a:solidFill>
+                  <a:srgbClr val="000000"/>
+                </a:solidFill>
+                <a:effectLst/>
+                <a:uLnTx/>
+                <a:uFillTx/>
+                <a:latin typeface="Trebuchet MS" panose="020B0603020202020204" pitchFamily="34" charset="0"/>
+                <a:cs typeface="Arial"/>
+                <a:sym typeface="Arial"/>
+              </a:rPr>
+              <a:t>Prof</a:t>
+            </a:r>
+            <a:r>
+              <a:rPr kumimoji="0" lang="en-US" sz="2000" b="1" i="0" u="none" strike="noStrike" kern="0" cap="none" spc="0" normalizeH="0" baseline="0" noProof="0" dirty="0">
+                <a:ln>
+                  <a:noFill/>
+                </a:ln>
+                <a:solidFill>
+                  <a:srgbClr val="000000"/>
+                </a:solidFill>
+                <a:effectLst/>
+                <a:uLnTx/>
+                <a:uFillTx/>
+                <a:latin typeface="Trebuchet MS" panose="020B0603020202020204" pitchFamily="34" charset="0"/>
+                <a:cs typeface="Arial"/>
+                <a:sym typeface="Arial"/>
+              </a:rPr>
+              <a:t>. </a:t>
+            </a:r>
+            <a:r>
+              <a:rPr lang="en-US" sz="2000" b="1" kern="0" dirty="0" smtClean="0">
+                <a:solidFill>
+                  <a:srgbClr val="000000"/>
+                </a:solidFill>
+                <a:latin typeface="Trebuchet MS" panose="020B0603020202020204" pitchFamily="34" charset="0"/>
+                <a:cs typeface="Arial"/>
+                <a:sym typeface="Arial"/>
+              </a:rPr>
+              <a:t>Abhishek Chauhan</a:t>
+            </a:r>
+            <a:r>
+              <a:rPr kumimoji="0" lang="en-US" sz="2000" b="1" i="0" u="none" strike="noStrike" kern="0" cap="none" spc="0" normalizeH="0" baseline="0" noProof="0" dirty="0" smtClean="0">
+                <a:ln>
+                  <a:noFill/>
+                </a:ln>
+                <a:solidFill>
+                  <a:srgbClr val="000000"/>
+                </a:solidFill>
+                <a:effectLst/>
+                <a:uLnTx/>
+                <a:uFillTx/>
+                <a:latin typeface="Trebuchet MS" panose="020B0603020202020204" pitchFamily="34" charset="0"/>
+                <a:cs typeface="Arial"/>
+                <a:sym typeface="Arial"/>
+              </a:rPr>
+              <a:t> </a:t>
+            </a:r>
+            <a:endParaRPr kumimoji="0" lang="en-US" sz="2000" b="1" i="0" u="none" strike="noStrike" kern="0" cap="none" spc="0" normalizeH="0" baseline="0" noProof="0" dirty="0">
+              <a:ln>
+                <a:noFill/>
+              </a:ln>
+              <a:solidFill>
+                <a:srgbClr val="000000"/>
+              </a:solidFill>
+              <a:effectLst/>
+              <a:uLnTx/>
+              <a:uFillTx/>
+              <a:latin typeface="Trebuchet MS" panose="020B0603020202020204" pitchFamily="34" charset="0"/>
+              <a:cs typeface="Arial"/>
+              <a:sym typeface="Arial"/>
+            </a:endParaRPr>
+          </a:p>
+          <a:p>
+            <a:pPr marL="0" marR="0" lvl="0" indent="0" algn="l" defTabSz="1219170" rtl="0" eaLnBrk="1" fontAlgn="auto" latinLnBrk="0" hangingPunct="1">
+              <a:lnSpc>
+                <a:spcPct val="100000"/>
+              </a:lnSpc>
+              <a:spcBef>
+                <a:spcPts val="600"/>
+              </a:spcBef>
+              <a:spcAft>
+                <a:spcPts val="600"/>
+              </a:spcAft>
+              <a:buClr>
+                <a:srgbClr val="000000"/>
+              </a:buClr>
+              <a:buSzTx/>
+              <a:buFontTx/>
+              <a:buNone/>
+              <a:tabLst/>
+              <a:defRPr/>
+            </a:pPr>
+            <a:r>
+              <a:rPr kumimoji="0" lang="en-US" sz="2000" b="1" i="0" u="none" strike="noStrike" kern="0" cap="none" spc="0" normalizeH="0" baseline="0" noProof="0" dirty="0" smtClean="0">
+                <a:ln>
+                  <a:noFill/>
+                </a:ln>
+                <a:solidFill>
+                  <a:srgbClr val="000000"/>
+                </a:solidFill>
+                <a:effectLst/>
+                <a:uLnTx/>
+                <a:uFillTx/>
+                <a:latin typeface="Trebuchet MS" panose="020B0603020202020204" pitchFamily="34" charset="0"/>
+                <a:cs typeface="Arial"/>
+                <a:sym typeface="Arial"/>
+              </a:rPr>
+              <a:t>CSE- AI, ML &amp; DS </a:t>
+            </a:r>
+            <a:r>
+              <a:rPr kumimoji="0" lang="en-US" sz="2000" b="1" i="0" u="none" strike="noStrike" kern="0" cap="none" spc="0" normalizeH="0" baseline="0" noProof="0" dirty="0">
+                <a:ln>
+                  <a:noFill/>
+                </a:ln>
+                <a:solidFill>
+                  <a:srgbClr val="000000"/>
+                </a:solidFill>
+                <a:effectLst/>
+                <a:uLnTx/>
+                <a:uFillTx/>
+                <a:latin typeface="Trebuchet MS" panose="020B0603020202020204" pitchFamily="34" charset="0"/>
+                <a:cs typeface="Arial"/>
+                <a:sym typeface="Arial"/>
+              </a:rPr>
+              <a:t>Department</a:t>
+            </a:r>
+            <a:endParaRPr kumimoji="0" sz="2000" b="1" i="0" u="none" strike="noStrike" kern="0" cap="none" spc="0" normalizeH="0" baseline="0" noProof="0" dirty="0">
+              <a:ln>
+                <a:noFill/>
+              </a:ln>
+              <a:solidFill>
+                <a:srgbClr val="000000"/>
+              </a:solidFill>
+              <a:effectLst/>
+              <a:uLnTx/>
+              <a:uFillTx/>
+              <a:latin typeface="Trebuchet MS" panose="020B0603020202020204" pitchFamily="34" charset="0"/>
+              <a:cs typeface="Arial"/>
+              <a:sym typeface="Arial"/>
+            </a:endParaRPr>
+          </a:p>
+        </p:txBody>
+      </p:sp>
     </p:spTree>
   </p:cSld>
   <p:clrMapOvr>
@@ -12857,29 +13038,8 @@
                 <a:cs typeface="Proxima Nova"/>
                 <a:sym typeface="Proxima Nova"/>
               </a:rPr>
-              <a:t>Pseudo-Code C</a:t>
-            </a:r>
-            <a:r>
-              <a:rPr lang="en-IN" sz="2800" b="1" dirty="0">
-                <a:solidFill>
-                  <a:schemeClr val="tx1"/>
-                </a:solidFill>
-                <a:latin typeface="Proxima Nova" panose="020B0604020202020204" charset="0"/>
-                <a:ea typeface="Proxima Nova"/>
-                <a:cs typeface="Proxima Nova"/>
-                <a:sym typeface="Proxima Nova"/>
-              </a:rPr>
-              <a:t>onventions</a:t>
-            </a:r>
-            <a:endParaRPr lang="en-IN" sz="2800" b="1" dirty="0">
-              <a:solidFill>
-                <a:schemeClr val="tx1"/>
-              </a:solidFill>
-              <a:latin typeface="Proxima Nova" panose="020B0604020202020204" charset="0"/>
-              <a:ea typeface="Proxima Nova"/>
-              <a:cs typeface="Proxima Nova"/>
-              <a:sym typeface="Proxima Nova"/>
-            </a:endParaRPr>
+              <a:t>Pseudo-Code Conventions</a:t>
+            </a:r>
           </a:p>
         </p:txBody>
       </p:sp>
@@ -27157,8 +27317,8 @@
           </a:prstGeom>
         </p:spPr>
       </p:pic>
-      <mc:AlternateContent xmlns:mc="http://schemas.openxmlformats.org/markup-compatibility/2006">
-        <mc:Choice xmlns:a14="http://schemas.microsoft.com/office/drawing/2010/main" Requires="a14">
+      <mc:AlternateContent xmlns:mc="http://schemas.openxmlformats.org/markup-compatibility/2006" xmlns:a14="http://schemas.microsoft.com/office/drawing/2010/main">
+        <mc:Choice Requires="a14">
           <p:sp>
             <p:nvSpPr>
               <p:cNvPr id="7" name="Content Placeholder 2"/>
@@ -27571,7 +27731,7 @@
             </p:txBody>
           </p:sp>
         </mc:Choice>
-        <mc:Fallback>
+        <mc:Fallback xmlns="">
           <p:sp>
             <p:nvSpPr>
               <p:cNvPr id="7" name="Content Placeholder 2"/>
@@ -28105,8 +28265,8 @@
           <a:chExt cx="0" cy="0"/>
         </a:xfrm>
       </p:grpSpPr>
-      <mc:AlternateContent xmlns:mc="http://schemas.openxmlformats.org/markup-compatibility/2006">
-        <mc:Choice xmlns:a14="http://schemas.microsoft.com/office/drawing/2010/main" Requires="a14">
+      <mc:AlternateContent xmlns:mc="http://schemas.openxmlformats.org/markup-compatibility/2006" xmlns:a14="http://schemas.microsoft.com/office/drawing/2010/main">
+        <mc:Choice Requires="a14">
           <p:sp>
             <p:nvSpPr>
               <p:cNvPr id="3" name="Rectangle 2">
@@ -28702,7 +28862,7 @@
             </p:txBody>
           </p:sp>
         </mc:Choice>
-        <mc:Fallback>
+        <mc:Fallback xmlns="">
           <p:sp>
             <p:nvSpPr>
               <p:cNvPr id="3" name="Rectangle 2">
@@ -29726,8 +29886,8 @@
           <a:chExt cx="0" cy="0"/>
         </a:xfrm>
       </p:grpSpPr>
-      <mc:AlternateContent xmlns:mc="http://schemas.openxmlformats.org/markup-compatibility/2006">
-        <mc:Choice xmlns:a14="http://schemas.microsoft.com/office/drawing/2010/main" Requires="a14">
+      <mc:AlternateContent xmlns:mc="http://schemas.openxmlformats.org/markup-compatibility/2006" xmlns:a14="http://schemas.microsoft.com/office/drawing/2010/main">
+        <mc:Choice Requires="a14">
           <p:sp>
             <p:nvSpPr>
               <p:cNvPr id="3" name="Content Placeholder 2"/>
@@ -29967,7 +30127,7 @@
             </p:txBody>
           </p:sp>
         </mc:Choice>
-        <mc:Fallback>
+        <mc:Fallback xmlns="">
           <p:sp>
             <p:nvSpPr>
               <p:cNvPr id="3" name="Content Placeholder 2"/>
@@ -30005,8 +30165,8 @@
           </p:sp>
         </mc:Fallback>
       </mc:AlternateContent>
-      <mc:AlternateContent xmlns:mc="http://schemas.openxmlformats.org/markup-compatibility/2006">
-        <mc:Choice xmlns:a14="http://schemas.microsoft.com/office/drawing/2010/main" Requires="a14">
+      <mc:AlternateContent xmlns:mc="http://schemas.openxmlformats.org/markup-compatibility/2006" xmlns:a14="http://schemas.microsoft.com/office/drawing/2010/main">
+        <mc:Choice Requires="a14">
           <p:sp>
             <p:nvSpPr>
               <p:cNvPr id="4" name="TextBox 3"/>
@@ -30057,7 +30217,7 @@
                         <a:solidFill>
                           <a:srgbClr val="002060"/>
                         </a:solidFill>
-                        <a:latin typeface="Trebuchet MS" panose="020B0603020202020204" pitchFamily="34" charset="0"/>
+                        <a:latin typeface="Cambria Math" panose="02040503050406030204" pitchFamily="18" charset="0"/>
                         <a:ea typeface="+mn-ea"/>
                         <a:cs typeface="+mn-cs"/>
                       </a:rPr>
@@ -30068,7 +30228,7 @@
                         <a:solidFill>
                           <a:srgbClr val="002060"/>
                         </a:solidFill>
-                        <a:latin typeface="Trebuchet MS" panose="020B0603020202020204" pitchFamily="34" charset="0"/>
+                        <a:latin typeface="Cambria Math" panose="02040503050406030204" pitchFamily="18" charset="0"/>
                         <a:ea typeface="+mn-ea"/>
                         <a:cs typeface="+mn-cs"/>
                       </a:rPr>
@@ -30082,7 +30242,7 @@
                         <a:solidFill>
                           <a:srgbClr val="002060"/>
                         </a:solidFill>
-                        <a:latin typeface="Trebuchet MS" panose="020B0603020202020204" pitchFamily="34" charset="0"/>
+                        <a:latin typeface="Cambria Math" panose="02040503050406030204" pitchFamily="18" charset="0"/>
                         <a:ea typeface="+mn-ea"/>
                         <a:cs typeface="+mn-cs"/>
                       </a:rPr>
@@ -30093,7 +30253,7 @@
                         <a:solidFill>
                           <a:srgbClr val="002060"/>
                         </a:solidFill>
-                        <a:latin typeface="Trebuchet MS" panose="020B0603020202020204" pitchFamily="34" charset="0"/>
+                        <a:latin typeface="Cambria Math" panose="02040503050406030204" pitchFamily="18" charset="0"/>
                         <a:ea typeface="+mn-ea"/>
                         <a:cs typeface="+mn-cs"/>
                       </a:rPr>
@@ -30107,7 +30267,7 @@
                         <a:solidFill>
                           <a:srgbClr val="002060"/>
                         </a:solidFill>
-                        <a:latin typeface="Trebuchet MS" panose="020B0603020202020204" pitchFamily="34" charset="0"/>
+                        <a:latin typeface="Cambria Math" panose="02040503050406030204" pitchFamily="18" charset="0"/>
                         <a:ea typeface="+mn-ea"/>
                         <a:cs typeface="+mn-cs"/>
                       </a:rPr>
@@ -30118,7 +30278,7 @@
                         <a:solidFill>
                           <a:srgbClr val="002060"/>
                         </a:solidFill>
-                        <a:latin typeface="Trebuchet MS" panose="020B0603020202020204" pitchFamily="34" charset="0"/>
+                        <a:latin typeface="Cambria Math" panose="02040503050406030204" pitchFamily="18" charset="0"/>
                         <a:ea typeface="+mn-ea"/>
                         <a:cs typeface="+mn-cs"/>
                       </a:rPr>
@@ -30132,7 +30292,7 @@
                         <a:solidFill>
                           <a:srgbClr val="002060"/>
                         </a:solidFill>
-                        <a:latin typeface="Trebuchet MS" panose="020B0603020202020204" pitchFamily="34" charset="0"/>
+                        <a:latin typeface="Cambria Math" panose="02040503050406030204" pitchFamily="18" charset="0"/>
                         <a:ea typeface="+mn-ea"/>
                         <a:cs typeface="+mn-cs"/>
                       </a:rPr>
@@ -30143,7 +30303,7 @@
                         <a:solidFill>
                           <a:srgbClr val="002060"/>
                         </a:solidFill>
-                        <a:latin typeface="Trebuchet MS" panose="020B0603020202020204" pitchFamily="34" charset="0"/>
+                        <a:latin typeface="Cambria Math" panose="02040503050406030204" pitchFamily="18" charset="0"/>
                         <a:ea typeface="+mn-ea"/>
                         <a:cs typeface="+mn-cs"/>
                       </a:rPr>
@@ -30157,7 +30317,7 @@
                         <a:solidFill>
                           <a:srgbClr val="002060"/>
                         </a:solidFill>
-                        <a:latin typeface="Trebuchet MS" panose="020B0603020202020204" pitchFamily="34" charset="0"/>
+                        <a:latin typeface="Cambria Math" panose="02040503050406030204" pitchFamily="18" charset="0"/>
                         <a:ea typeface="+mn-ea"/>
                         <a:cs typeface="+mn-cs"/>
                       </a:rPr>
@@ -30168,7 +30328,7 @@
                         <a:solidFill>
                           <a:srgbClr val="002060"/>
                         </a:solidFill>
-                        <a:latin typeface="Trebuchet MS" panose="020B0603020202020204" pitchFamily="34" charset="0"/>
+                        <a:latin typeface="Cambria Math" panose="02040503050406030204" pitchFamily="18" charset="0"/>
                         <a:ea typeface="+mn-ea"/>
                         <a:cs typeface="+mn-cs"/>
                       </a:rPr>
@@ -30197,7 +30357,7 @@
                         <a:solidFill>
                           <a:srgbClr val="002060"/>
                         </a:solidFill>
-                        <a:latin typeface="Trebuchet MS" panose="020B0603020202020204" pitchFamily="34" charset="0"/>
+                        <a:latin typeface="Cambria Math" panose="02040503050406030204" pitchFamily="18" charset="0"/>
                         <a:ea typeface="+mn-ea"/>
                         <a:cs typeface="+mn-cs"/>
                       </a:rPr>
@@ -30221,11 +30381,11 @@
                     <m:sSub>
                       <m:sSubPr>
                         <m:ctrlPr>
-                          <a:rPr lang="en-US" sz="1650" kern="1200">
+                          <a:rPr lang="en-US" sz="1650" i="1" kern="1200">
                             <a:solidFill>
                               <a:srgbClr val="002060"/>
                             </a:solidFill>
-                            <a:latin typeface="Trebuchet MS" panose="020B0603020202020204" pitchFamily="34" charset="0"/>
+                            <a:latin typeface="Cambria Math" panose="02040503050406030204" pitchFamily="18" charset="0"/>
                             <a:ea typeface="+mn-ea"/>
                             <a:cs typeface="+mn-cs"/>
                           </a:rPr>
@@ -30237,7 +30397,7 @@
                             <a:solidFill>
                               <a:srgbClr val="002060"/>
                             </a:solidFill>
-                            <a:latin typeface="Trebuchet MS" panose="020B0603020202020204" pitchFamily="34" charset="0"/>
+                            <a:latin typeface="Cambria Math" panose="02040503050406030204" pitchFamily="18" charset="0"/>
                             <a:ea typeface="+mn-ea"/>
                             <a:cs typeface="+mn-cs"/>
                           </a:rPr>
@@ -30250,7 +30410,7 @@
                             <a:solidFill>
                               <a:srgbClr val="002060"/>
                             </a:solidFill>
-                            <a:latin typeface="Trebuchet MS" panose="020B0603020202020204" pitchFamily="34" charset="0"/>
+                            <a:latin typeface="Cambria Math" panose="02040503050406030204" pitchFamily="18" charset="0"/>
                             <a:ea typeface="+mn-ea"/>
                             <a:cs typeface="+mn-cs"/>
                           </a:rPr>
@@ -30278,7 +30438,7 @@
                         <a:solidFill>
                           <a:srgbClr val="002060"/>
                         </a:solidFill>
-                        <a:latin typeface="Trebuchet MS" panose="020B0603020202020204" pitchFamily="34" charset="0"/>
+                        <a:latin typeface="Cambria Math" panose="02040503050406030204" pitchFamily="18" charset="0"/>
                         <a:ea typeface="+mn-ea"/>
                         <a:cs typeface="+mn-cs"/>
                       </a:rPr>
@@ -30292,7 +30452,7 @@
                         <a:solidFill>
                           <a:srgbClr val="002060"/>
                         </a:solidFill>
-                        <a:latin typeface="Trebuchet MS" panose="020B0603020202020204" pitchFamily="34" charset="0"/>
+                        <a:latin typeface="Cambria Math" panose="02040503050406030204" pitchFamily="18" charset="0"/>
                         <a:ea typeface="+mn-ea"/>
                         <a:cs typeface="+mn-cs"/>
                       </a:rPr>
@@ -30301,11 +30461,11 @@
                     <m:d>
                       <m:dPr>
                         <m:ctrlPr>
-                          <a:rPr lang="en-US" sz="1650" kern="1200">
+                          <a:rPr lang="en-US" sz="1650" i="1" kern="1200">
                             <a:solidFill>
                               <a:srgbClr val="002060"/>
                             </a:solidFill>
-                            <a:latin typeface="Trebuchet MS" panose="020B0603020202020204" pitchFamily="34" charset="0"/>
+                            <a:latin typeface="Cambria Math" panose="02040503050406030204" pitchFamily="18" charset="0"/>
                             <a:ea typeface="+mn-ea"/>
                             <a:cs typeface="+mn-cs"/>
                           </a:rPr>
@@ -30320,7 +30480,7 @@
                             <a:solidFill>
                               <a:srgbClr val="002060"/>
                             </a:solidFill>
-                            <a:latin typeface="Trebuchet MS" panose="020B0603020202020204" pitchFamily="34" charset="0"/>
+                            <a:latin typeface="Cambria Math" panose="02040503050406030204" pitchFamily="18" charset="0"/>
                             <a:ea typeface="+mn-ea"/>
                             <a:cs typeface="+mn-cs"/>
                           </a:rPr>
@@ -30333,7 +30493,7 @@
                         <a:solidFill>
                           <a:srgbClr val="002060"/>
                         </a:solidFill>
-                        <a:latin typeface="Trebuchet MS" panose="020B0603020202020204" pitchFamily="34" charset="0"/>
+                        <a:latin typeface="Cambria Math" panose="02040503050406030204" pitchFamily="18" charset="0"/>
                         <a:ea typeface="+mn-ea"/>
                         <a:cs typeface="+mn-cs"/>
                       </a:rPr>
@@ -30347,7 +30507,7 @@
                         <a:solidFill>
                           <a:srgbClr val="002060"/>
                         </a:solidFill>
-                        <a:latin typeface="Trebuchet MS" panose="020B0603020202020204" pitchFamily="34" charset="0"/>
+                        <a:latin typeface="Cambria Math" panose="02040503050406030204" pitchFamily="18" charset="0"/>
                         <a:ea typeface="+mn-ea"/>
                         <a:cs typeface="+mn-cs"/>
                       </a:rPr>
@@ -30356,11 +30516,11 @@
                     <m:d>
                       <m:dPr>
                         <m:ctrlPr>
-                          <a:rPr lang="en-US" sz="1650" kern="1200">
+                          <a:rPr lang="en-US" sz="1650" i="1" kern="1200">
                             <a:solidFill>
                               <a:srgbClr val="002060"/>
                             </a:solidFill>
-                            <a:latin typeface="Trebuchet MS" panose="020B0603020202020204" pitchFamily="34" charset="0"/>
+                            <a:latin typeface="Cambria Math" panose="02040503050406030204" pitchFamily="18" charset="0"/>
                             <a:ea typeface="+mn-ea"/>
                             <a:cs typeface="+mn-cs"/>
                           </a:rPr>
@@ -30375,7 +30535,7 @@
                             <a:solidFill>
                               <a:srgbClr val="002060"/>
                             </a:solidFill>
-                            <a:latin typeface="Trebuchet MS" panose="020B0603020202020204" pitchFamily="34" charset="0"/>
+                            <a:latin typeface="Cambria Math" panose="02040503050406030204" pitchFamily="18" charset="0"/>
                             <a:ea typeface="+mn-ea"/>
                             <a:cs typeface="+mn-cs"/>
                           </a:rPr>
@@ -30388,7 +30548,7 @@
                         <a:solidFill>
                           <a:srgbClr val="002060"/>
                         </a:solidFill>
-                        <a:latin typeface="Trebuchet MS" panose="020B0603020202020204" pitchFamily="34" charset="0"/>
+                        <a:latin typeface="Cambria Math" panose="02040503050406030204" pitchFamily="18" charset="0"/>
                         <a:ea typeface="+mn-ea"/>
                         <a:cs typeface="+mn-cs"/>
                       </a:rPr>
@@ -30412,11 +30572,11 @@
                     <m:sSub>
                       <m:sSubPr>
                         <m:ctrlPr>
-                          <a:rPr lang="en-US" sz="1650" kern="1200">
+                          <a:rPr lang="en-US" sz="1650" i="1" kern="1200">
                             <a:solidFill>
                               <a:srgbClr val="002060"/>
                             </a:solidFill>
-                            <a:latin typeface="Trebuchet MS" panose="020B0603020202020204" pitchFamily="34" charset="0"/>
+                            <a:latin typeface="Cambria Math" panose="02040503050406030204" pitchFamily="18" charset="0"/>
                             <a:ea typeface="+mn-ea"/>
                             <a:cs typeface="+mn-cs"/>
                           </a:rPr>
@@ -30428,7 +30588,7 @@
                             <a:solidFill>
                               <a:srgbClr val="002060"/>
                             </a:solidFill>
-                            <a:latin typeface="Trebuchet MS" panose="020B0603020202020204" pitchFamily="34" charset="0"/>
+                            <a:latin typeface="Cambria Math" panose="02040503050406030204" pitchFamily="18" charset="0"/>
                             <a:ea typeface="+mn-ea"/>
                             <a:cs typeface="+mn-cs"/>
                           </a:rPr>
@@ -30441,7 +30601,7 @@
                             <a:solidFill>
                               <a:srgbClr val="002060"/>
                             </a:solidFill>
-                            <a:latin typeface="Trebuchet MS" panose="020B0603020202020204" pitchFamily="34" charset="0"/>
+                            <a:latin typeface="Cambria Math" panose="02040503050406030204" pitchFamily="18" charset="0"/>
                             <a:ea typeface="+mn-ea"/>
                             <a:cs typeface="+mn-cs"/>
                           </a:rPr>
@@ -30454,7 +30614,7 @@
                         <a:solidFill>
                           <a:srgbClr val="002060"/>
                         </a:solidFill>
-                        <a:latin typeface="Trebuchet MS" panose="020B0603020202020204" pitchFamily="34" charset="0"/>
+                        <a:latin typeface="Cambria Math" panose="02040503050406030204" pitchFamily="18" charset="0"/>
                         <a:ea typeface="+mn-ea"/>
                         <a:cs typeface="+mn-cs"/>
                       </a:rPr>
@@ -30468,7 +30628,7 @@
                         <a:solidFill>
                           <a:srgbClr val="002060"/>
                         </a:solidFill>
-                        <a:latin typeface="Trebuchet MS" panose="020B0603020202020204" pitchFamily="34" charset="0"/>
+                        <a:latin typeface="Cambria Math" panose="02040503050406030204" pitchFamily="18" charset="0"/>
                         <a:ea typeface="+mn-ea"/>
                         <a:cs typeface="+mn-cs"/>
                       </a:rPr>
@@ -30479,7 +30639,7 @@
                         <a:solidFill>
                           <a:srgbClr val="002060"/>
                         </a:solidFill>
-                        <a:latin typeface="Trebuchet MS" panose="020B0603020202020204" pitchFamily="34" charset="0"/>
+                        <a:latin typeface="Cambria Math" panose="02040503050406030204" pitchFamily="18" charset="0"/>
                         <a:ea typeface="+mn-ea"/>
                         <a:cs typeface="+mn-cs"/>
                       </a:rPr>
@@ -30499,7 +30659,7 @@
             </p:txBody>
           </p:sp>
         </mc:Choice>
-        <mc:Fallback>
+        <mc:Fallback xmlns="">
           <p:sp>
             <p:nvSpPr>
               <p:cNvPr id="4" name="TextBox 3"/>
@@ -30623,27 +30783,8 @@
                 <a:ea typeface="Cambria" panose="02040503050406030204" pitchFamily="18" charset="0"/>
                 <a:cs typeface="Calibri" panose="020F0502020204030204" pitchFamily="34" charset="0"/>
               </a:rPr>
-              <a:t>𝛀-Notation (Omega notation</a:t>
-            </a:r>
-            <a:r>
-              <a:rPr lang="en-US" sz="2800" b="1" kern="1200" spc="-1" dirty="0">
-                <a:solidFill>
-                  <a:prstClr val="black"/>
-                </a:solidFill>
-                <a:latin typeface="Trebuchet MS" panose="020B0603020202020204" pitchFamily="34" charset="0"/>
-                <a:ea typeface="Cambria" panose="02040503050406030204" pitchFamily="18" charset="0"/>
-                <a:cs typeface="Calibri" panose="020F0502020204030204" pitchFamily="34" charset="0"/>
-              </a:rPr>
-              <a:t>)</a:t>
-            </a:r>
-            <a:endParaRPr lang="en-US" sz="2800" b="1" kern="1200" spc="-1" dirty="0">
-              <a:solidFill>
-                <a:prstClr val="black"/>
-              </a:solidFill>
-              <a:latin typeface="Trebuchet MS" panose="020B0603020202020204" pitchFamily="34" charset="0"/>
-              <a:ea typeface="Cambria" panose="02040503050406030204" pitchFamily="18" charset="0"/>
-              <a:cs typeface="Calibri" panose="020F0502020204030204" pitchFamily="34" charset="0"/>
-            </a:endParaRPr>
+              <a:t>𝛀-Notation (Omega notation)</a:t>
+            </a:r>
           </a:p>
         </p:txBody>
       </p:sp>
@@ -31026,8 +31167,8 @@
           <a:chExt cx="0" cy="0"/>
         </a:xfrm>
       </p:grpSpPr>
-      <mc:AlternateContent xmlns:mc="http://schemas.openxmlformats.org/markup-compatibility/2006">
-        <mc:Choice xmlns:a14="http://schemas.microsoft.com/office/drawing/2010/main" Requires="a14">
+      <mc:AlternateContent xmlns:mc="http://schemas.openxmlformats.org/markup-compatibility/2006" xmlns:a14="http://schemas.microsoft.com/office/drawing/2010/main">
+        <mc:Choice Requires="a14">
           <p:sp>
             <p:nvSpPr>
               <p:cNvPr id="3" name="Content Placeholder 2"/>
@@ -31111,7 +31252,7 @@
             </p:txBody>
           </p:sp>
         </mc:Choice>
-        <mc:Fallback>
+        <mc:Fallback xmlns="">
           <p:sp>
             <p:nvSpPr>
               <p:cNvPr id="3" name="Content Placeholder 2"/>
@@ -31149,8 +31290,8 @@
           </p:sp>
         </mc:Fallback>
       </mc:AlternateContent>
-      <mc:AlternateContent xmlns:mc="http://schemas.openxmlformats.org/markup-compatibility/2006">
-        <mc:Choice xmlns:a14="http://schemas.microsoft.com/office/drawing/2010/main" Requires="a14">
+      <mc:AlternateContent xmlns:mc="http://schemas.openxmlformats.org/markup-compatibility/2006" xmlns:a14="http://schemas.microsoft.com/office/drawing/2010/main">
+        <mc:Choice Requires="a14">
           <p:sp>
             <p:nvSpPr>
               <p:cNvPr id="4" name="TextBox 3"/>
@@ -31576,7 +31717,7 @@
             </p:txBody>
           </p:sp>
         </mc:Choice>
-        <mc:Fallback>
+        <mc:Fallback xmlns="">
           <p:sp>
             <p:nvSpPr>
               <p:cNvPr id="4" name="TextBox 3"/>
@@ -31724,27 +31865,8 @@
                 <a:ea typeface="Cambria" panose="02040503050406030204" pitchFamily="18" charset="0"/>
                 <a:cs typeface="Calibri" panose="020F0502020204030204" pitchFamily="34" charset="0"/>
               </a:rPr>
-              <a:t>𝛀-Notation (Omega notation</a:t>
-            </a:r>
-            <a:r>
-              <a:rPr lang="en-US" sz="2800" b="1" kern="1200" spc="-1" dirty="0">
-                <a:solidFill>
-                  <a:prstClr val="black"/>
-                </a:solidFill>
-                <a:latin typeface="Trebuchet MS" panose="020B0603020202020204" pitchFamily="34" charset="0"/>
-                <a:ea typeface="Cambria" panose="02040503050406030204" pitchFamily="18" charset="0"/>
-                <a:cs typeface="Calibri" panose="020F0502020204030204" pitchFamily="34" charset="0"/>
-              </a:rPr>
-              <a:t>)</a:t>
-            </a:r>
-            <a:endParaRPr lang="en-US" sz="2800" b="1" kern="1200" spc="-1" dirty="0">
-              <a:solidFill>
-                <a:prstClr val="black"/>
-              </a:solidFill>
-              <a:latin typeface="Trebuchet MS" panose="020B0603020202020204" pitchFamily="34" charset="0"/>
-              <a:ea typeface="Cambria" panose="02040503050406030204" pitchFamily="18" charset="0"/>
-              <a:cs typeface="Calibri" panose="020F0502020204030204" pitchFamily="34" charset="0"/>
-            </a:endParaRPr>
+              <a:t>𝛀-Notation (Omega notation)</a:t>
+            </a:r>
           </a:p>
         </p:txBody>
       </p:sp>
@@ -31778,8 +31900,8 @@
           <a:chExt cx="0" cy="0"/>
         </a:xfrm>
       </p:grpSpPr>
-      <mc:AlternateContent xmlns:mc="http://schemas.openxmlformats.org/markup-compatibility/2006">
-        <mc:Choice xmlns:a14="http://schemas.microsoft.com/office/drawing/2010/main" Requires="a14">
+      <mc:AlternateContent xmlns:mc="http://schemas.openxmlformats.org/markup-compatibility/2006" xmlns:a14="http://schemas.microsoft.com/office/drawing/2010/main">
+        <mc:Choice Requires="a14">
           <p:sp>
             <p:nvSpPr>
               <p:cNvPr id="3" name="Rectangle 2">
@@ -32337,7 +32459,7 @@
             </p:txBody>
           </p:sp>
         </mc:Choice>
-        <mc:Fallback>
+        <mc:Fallback xmlns="">
           <p:sp>
             <p:nvSpPr>
               <p:cNvPr id="3" name="Rectangle 2">
@@ -33248,14 +33370,6 @@
               </a:rPr>
               <a:t>𝛀-Notation (Omega notation)</a:t>
             </a:r>
-            <a:endParaRPr lang="en-US" sz="2800" b="1" kern="1200" spc="-1" dirty="0">
-              <a:solidFill>
-                <a:prstClr val="black"/>
-              </a:solidFill>
-              <a:latin typeface="Trebuchet MS" panose="020B0603020202020204" pitchFamily="34" charset="0"/>
-              <a:ea typeface="Cambria" panose="02040503050406030204" pitchFamily="18" charset="0"/>
-              <a:cs typeface="Calibri" panose="020F0502020204030204" pitchFamily="34" charset="0"/>
-            </a:endParaRPr>
           </a:p>
         </p:txBody>
       </p:sp>
@@ -33289,8 +33403,8 @@
           <a:chExt cx="0" cy="0"/>
         </a:xfrm>
       </p:grpSpPr>
-      <mc:AlternateContent xmlns:mc="http://schemas.openxmlformats.org/markup-compatibility/2006">
-        <mc:Choice xmlns:a14="http://schemas.microsoft.com/office/drawing/2010/main" Requires="a14">
+      <mc:AlternateContent xmlns:mc="http://schemas.openxmlformats.org/markup-compatibility/2006" xmlns:a14="http://schemas.microsoft.com/office/drawing/2010/main">
+        <mc:Choice Requires="a14">
           <p:sp>
             <p:nvSpPr>
               <p:cNvPr id="3" name="Content Placeholder 2"/>
@@ -33500,7 +33614,7 @@
             </p:txBody>
           </p:sp>
         </mc:Choice>
-        <mc:Fallback>
+        <mc:Fallback xmlns="">
           <p:sp>
             <p:nvSpPr>
               <p:cNvPr id="3" name="Content Placeholder 2"/>
@@ -33538,8 +33652,8 @@
           </p:sp>
         </mc:Fallback>
       </mc:AlternateContent>
-      <mc:AlternateContent xmlns:mc="http://schemas.openxmlformats.org/markup-compatibility/2006">
-        <mc:Choice xmlns:a14="http://schemas.microsoft.com/office/drawing/2010/main" Requires="a14">
+      <mc:AlternateContent xmlns:mc="http://schemas.openxmlformats.org/markup-compatibility/2006" xmlns:a14="http://schemas.microsoft.com/office/drawing/2010/main">
+        <mc:Choice Requires="a14">
           <p:sp>
             <p:nvSpPr>
               <p:cNvPr id="4" name="TextBox 3"/>
@@ -34166,7 +34280,7 @@
             </p:txBody>
           </p:sp>
         </mc:Choice>
-        <mc:Fallback>
+        <mc:Fallback xmlns="">
           <p:sp>
             <p:nvSpPr>
               <p:cNvPr id="4" name="TextBox 3"/>
@@ -34300,18 +34414,7 @@
                 <a:ea typeface="Cambria" panose="02040503050406030204" pitchFamily="18" charset="0"/>
                 <a:cs typeface="Calibri" panose="020F0502020204030204" pitchFamily="34" charset="0"/>
               </a:rPr>
-              <a:t>𝛉</a:t>
-            </a:r>
-            <a:r>
-              <a:rPr lang="en-US" sz="2800" b="1" kern="1200" spc="-1" dirty="0">
-                <a:solidFill>
-                  <a:prstClr val="black"/>
-                </a:solidFill>
-                <a:latin typeface="Trebuchet MS" panose="020B0603020202020204" pitchFamily="34" charset="0"/>
-                <a:ea typeface="Cambria" panose="02040503050406030204" pitchFamily="18" charset="0"/>
-                <a:cs typeface="Calibri" panose="020F0502020204030204" pitchFamily="34" charset="0"/>
-              </a:rPr>
-              <a:t>-Notation (Theta notation)</a:t>
+              <a:t>𝛉-Notation (Theta notation)</a:t>
             </a:r>
           </a:p>
           <a:p>
@@ -34363,8 +34466,8 @@
           <a:chExt cx="0" cy="0"/>
         </a:xfrm>
       </p:grpSpPr>
-      <mc:AlternateContent xmlns:mc="http://schemas.openxmlformats.org/markup-compatibility/2006">
-        <mc:Choice xmlns:a14="http://schemas.microsoft.com/office/drawing/2010/main" Requires="a14">
+      <mc:AlternateContent xmlns:mc="http://schemas.openxmlformats.org/markup-compatibility/2006" xmlns:a14="http://schemas.microsoft.com/office/drawing/2010/main">
+        <mc:Choice Requires="a14">
           <p:sp>
             <p:nvSpPr>
               <p:cNvPr id="3" name="Rectangle 2">
@@ -35082,7 +35185,7 @@
             </p:txBody>
           </p:sp>
         </mc:Choice>
-        <mc:Fallback>
+        <mc:Fallback xmlns="">
           <p:sp>
             <p:nvSpPr>
               <p:cNvPr id="3" name="Rectangle 2">
@@ -36181,14 +36284,6 @@
               </a:rPr>
               <a:t>𝛉-Notation (Theta notation)</a:t>
             </a:r>
-            <a:endParaRPr lang="en-US" sz="2800" b="1" kern="1200" spc="-1" dirty="0">
-              <a:solidFill>
-                <a:prstClr val="black"/>
-              </a:solidFill>
-              <a:latin typeface="Trebuchet MS" panose="020B0603020202020204" pitchFamily="34" charset="0"/>
-              <a:ea typeface="Cambria" panose="02040503050406030204" pitchFamily="18" charset="0"/>
-              <a:cs typeface="Calibri" panose="020F0502020204030204" pitchFamily="34" charset="0"/>
-            </a:endParaRPr>
           </a:p>
         </p:txBody>
       </p:sp>
@@ -36392,8 +36487,8 @@
           </a:p>
         </p:txBody>
       </p:sp>
-      <mc:AlternateContent xmlns:mc="http://schemas.openxmlformats.org/markup-compatibility/2006">
-        <mc:Choice xmlns:a14="http://schemas.microsoft.com/office/drawing/2010/main" Requires="a14">
+      <mc:AlternateContent xmlns:mc="http://schemas.openxmlformats.org/markup-compatibility/2006" xmlns:a14="http://schemas.microsoft.com/office/drawing/2010/main">
+        <mc:Choice Requires="a14">
           <p:sp>
             <p:nvSpPr>
               <p:cNvPr id="18" name="TextBox 17"/>
@@ -36799,7 +36894,7 @@
             </p:txBody>
           </p:sp>
         </mc:Choice>
-        <mc:Fallback>
+        <mc:Fallback xmlns="">
           <p:sp>
             <p:nvSpPr>
               <p:cNvPr id="18" name="TextBox 17"/>
@@ -36845,8 +36940,8 @@
           </p:sp>
         </mc:Fallback>
       </mc:AlternateContent>
-      <mc:AlternateContent xmlns:mc="http://schemas.openxmlformats.org/markup-compatibility/2006">
-        <mc:Choice xmlns:a14="http://schemas.microsoft.com/office/drawing/2010/main" Requires="a14">
+      <mc:AlternateContent xmlns:mc="http://schemas.openxmlformats.org/markup-compatibility/2006" xmlns:a14="http://schemas.microsoft.com/office/drawing/2010/main">
+        <mc:Choice Requires="a14">
           <p:sp>
             <p:nvSpPr>
               <p:cNvPr id="19" name="TextBox 18"/>
@@ -36899,33 +36994,45 @@
                       <m:rPr>
                         <m:sty m:val="p"/>
                       </m:rPr>
-                      <a:rPr lang="el-GR" sz="1800" kern="1200"/>
+                      <a:rPr lang="el-GR" sz="1800" kern="1200">
+                        <a:latin typeface="Cambria Math" panose="02040503050406030204" pitchFamily="18" charset="0"/>
+                      </a:rPr>
                       <m:t>Ω</m:t>
                     </m:r>
                     <m:r>
-                      <a:rPr lang="en-US" sz="1800" kern="1200"/>
+                      <a:rPr lang="en-US" sz="1800" kern="1200">
+                        <a:latin typeface="Cambria Math" panose="02040503050406030204" pitchFamily="18" charset="0"/>
+                      </a:rPr>
                       <m:t>(</m:t>
                     </m:r>
                     <m:r>
                       <m:rPr>
                         <m:sty m:val="p"/>
                       </m:rPr>
-                      <a:rPr lang="en-US" sz="1800" kern="1200"/>
+                      <a:rPr lang="en-US" sz="1800" kern="1200">
+                        <a:latin typeface="Cambria Math" panose="02040503050406030204" pitchFamily="18" charset="0"/>
+                      </a:rPr>
                       <m:t>g</m:t>
                     </m:r>
                     <m:r>
-                      <a:rPr lang="en-US" sz="1800" kern="1200"/>
+                      <a:rPr lang="en-US" sz="1800" kern="1200">
+                        <a:latin typeface="Cambria Math" panose="02040503050406030204" pitchFamily="18" charset="0"/>
+                      </a:rPr>
                       <m:t>(</m:t>
                     </m:r>
                     <m:r>
                       <m:rPr>
                         <m:sty m:val="p"/>
                       </m:rPr>
-                      <a:rPr lang="en-US" sz="1800" kern="1200"/>
+                      <a:rPr lang="en-US" sz="1800" kern="1200">
+                        <a:latin typeface="Cambria Math" panose="02040503050406030204" pitchFamily="18" charset="0"/>
+                      </a:rPr>
                       <m:t>n</m:t>
                     </m:r>
                     <m:r>
-                      <a:rPr lang="en-US" sz="1800" kern="1200"/>
+                      <a:rPr lang="en-US" sz="1800" kern="1200">
+                        <a:latin typeface="Cambria Math" panose="02040503050406030204" pitchFamily="18" charset="0"/>
+                      </a:rPr>
                       <m:t>)) </m:t>
                     </m:r>
                   </m:oMath>
@@ -36942,22 +37049,30 @@
                       <m:rPr>
                         <m:sty m:val="p"/>
                       </m:rPr>
-                      <a:rPr lang="en-US" sz="1800" kern="1200"/>
+                      <a:rPr lang="en-US" sz="1800" kern="1200">
+                        <a:latin typeface="Cambria Math" panose="02040503050406030204" pitchFamily="18" charset="0"/>
+                      </a:rPr>
                       <m:t>f</m:t>
                     </m:r>
                     <m:r>
-                      <a:rPr lang="en-US" sz="1800" kern="1200"/>
+                      <a:rPr lang="en-US" sz="1800" kern="1200">
+                        <a:latin typeface="Cambria Math" panose="02040503050406030204" pitchFamily="18" charset="0"/>
+                      </a:rPr>
                       <m:t>(</m:t>
                     </m:r>
                     <m:r>
                       <m:rPr>
                         <m:sty m:val="p"/>
                       </m:rPr>
-                      <a:rPr lang="en-US" sz="1800" kern="1200"/>
+                      <a:rPr lang="en-US" sz="1800" kern="1200">
+                        <a:latin typeface="Cambria Math" panose="02040503050406030204" pitchFamily="18" charset="0"/>
+                      </a:rPr>
                       <m:t>n</m:t>
                     </m:r>
                     <m:r>
-                      <a:rPr lang="en-US" sz="1800" kern="1200"/>
+                      <a:rPr lang="en-US" sz="1800" kern="1200">
+                        <a:latin typeface="Cambria Math" panose="02040503050406030204" pitchFamily="18" charset="0"/>
+                      </a:rPr>
                       <m:t>)</m:t>
                     </m:r>
                   </m:oMath>
@@ -36974,7 +37089,9 @@
                       <m:rPr>
                         <m:sty m:val="p"/>
                       </m:rPr>
-                      <a:rPr lang="en-US" sz="1800" kern="1200"/>
+                      <a:rPr lang="en-US" sz="1800" kern="1200">
+                        <a:latin typeface="Cambria Math" panose="02040503050406030204" pitchFamily="18" charset="0"/>
+                      </a:rPr>
                       <m:t>c</m:t>
                     </m:r>
                   </m:oMath>
@@ -36990,18 +37107,24 @@
                     <m:sSub>
                       <m:sSubPr>
                         <m:ctrlPr>
-                          <a:rPr lang="en-US" sz="1800" i="1" kern="1200"/>
+                          <a:rPr lang="en-US" sz="1800" i="1" kern="1200">
+                            <a:latin typeface="Cambria Math" panose="02040503050406030204" pitchFamily="18" charset="0"/>
+                          </a:rPr>
                         </m:ctrlPr>
                       </m:sSubPr>
                       <m:e>
                         <m:r>
-                          <a:rPr lang="en-US" sz="1800" i="1" kern="1200"/>
+                          <a:rPr lang="en-US" sz="1800" i="1" kern="1200">
+                            <a:latin typeface="Cambria Math" panose="02040503050406030204" pitchFamily="18" charset="0"/>
+                          </a:rPr>
                           <m:t>𝑛</m:t>
                         </m:r>
                       </m:e>
                       <m:sub>
                         <m:r>
-                          <a:rPr lang="en-US" sz="1800" i="1" kern="1200"/>
+                          <a:rPr lang="en-US" sz="1800" i="1" kern="1200">
+                            <a:latin typeface="Cambria Math" panose="02040503050406030204" pitchFamily="18" charset="0"/>
+                          </a:rPr>
                           <m:t>0</m:t>
                         </m:r>
                       </m:sub>
@@ -37017,53 +37140,73 @@
                 <a14:m>
                   <m:oMath xmlns:m="http://schemas.openxmlformats.org/officeDocument/2006/math">
                     <m:r>
-                      <a:rPr lang="en-US" sz="1800" b="1" i="1" kern="1200"/>
+                      <a:rPr lang="en-US" sz="1800" b="1" i="1" kern="1200">
+                        <a:latin typeface="Cambria Math" panose="02040503050406030204" pitchFamily="18" charset="0"/>
+                      </a:rPr>
                       <m:t>𝟎</m:t>
                     </m:r>
                     <m:r>
-                      <a:rPr lang="en-US" sz="1800" b="1" i="1" kern="1200"/>
+                      <a:rPr lang="en-US" sz="1800" b="1" i="1" kern="1200">
+                        <a:latin typeface="Cambria Math" panose="02040503050406030204" pitchFamily="18" charset="0"/>
+                      </a:rPr>
                       <m:t>≤</m:t>
                     </m:r>
                     <m:r>
-                      <a:rPr lang="en-US" sz="1800" b="1" i="1" kern="1200"/>
+                      <a:rPr lang="en-US" sz="1800" b="1" i="1" kern="1200">
+                        <a:latin typeface="Cambria Math" panose="02040503050406030204" pitchFamily="18" charset="0"/>
+                      </a:rPr>
                       <m:t>𝒄𝒈</m:t>
                     </m:r>
                     <m:d>
                       <m:dPr>
                         <m:ctrlPr>
-                          <a:rPr lang="en-US" sz="1800" b="1" i="1" kern="1200"/>
+                          <a:rPr lang="en-US" sz="1800" b="1" i="1" kern="1200">
+                            <a:latin typeface="Cambria Math" panose="02040503050406030204" pitchFamily="18" charset="0"/>
+                          </a:rPr>
                         </m:ctrlPr>
                       </m:dPr>
                       <m:e>
                         <m:r>
-                          <a:rPr lang="en-US" sz="1800" b="1" i="1" kern="1200"/>
+                          <a:rPr lang="en-US" sz="1800" b="1" i="1" kern="1200">
+                            <a:latin typeface="Cambria Math" panose="02040503050406030204" pitchFamily="18" charset="0"/>
+                          </a:rPr>
                           <m:t>𝒏</m:t>
                         </m:r>
                       </m:e>
                     </m:d>
                     <m:r>
-                      <a:rPr lang="en-US" sz="1800" b="1" i="1" kern="1200"/>
+                      <a:rPr lang="en-US" sz="1800" b="1" i="1" kern="1200">
+                        <a:latin typeface="Cambria Math" panose="02040503050406030204" pitchFamily="18" charset="0"/>
+                      </a:rPr>
                       <m:t>≤</m:t>
                     </m:r>
                     <m:r>
-                      <a:rPr lang="en-US" sz="1800" b="1" i="1" kern="1200"/>
+                      <a:rPr lang="en-US" sz="1800" b="1" i="1" kern="1200">
+                        <a:latin typeface="Cambria Math" panose="02040503050406030204" pitchFamily="18" charset="0"/>
+                      </a:rPr>
                       <m:t>𝒇</m:t>
                     </m:r>
                     <m:d>
                       <m:dPr>
                         <m:ctrlPr>
-                          <a:rPr lang="en-US" sz="1800" b="1" i="1" kern="1200"/>
+                          <a:rPr lang="en-US" sz="1800" b="1" i="1" kern="1200">
+                            <a:latin typeface="Cambria Math" panose="02040503050406030204" pitchFamily="18" charset="0"/>
+                          </a:rPr>
                         </m:ctrlPr>
                       </m:dPr>
                       <m:e>
                         <m:r>
-                          <a:rPr lang="en-US" sz="1800" b="1" i="1" kern="1200"/>
+                          <a:rPr lang="en-US" sz="1800" b="1" i="1" kern="1200">
+                            <a:latin typeface="Cambria Math" panose="02040503050406030204" pitchFamily="18" charset="0"/>
+                          </a:rPr>
                           <m:t>𝒏</m:t>
                         </m:r>
                       </m:e>
                     </m:d>
                     <m:r>
-                      <a:rPr lang="en-US" sz="1800" kern="1200"/>
+                      <a:rPr lang="en-US" sz="1800" kern="1200">
+                        <a:latin typeface="Cambria Math" panose="02040503050406030204" pitchFamily="18" charset="0"/>
+                      </a:rPr>
                       <m:t> </m:t>
                     </m:r>
                   </m:oMath>
@@ -37079,31 +37222,41 @@
                     <m:sSub>
                       <m:sSubPr>
                         <m:ctrlPr>
-                          <a:rPr lang="en-US" sz="1800" i="1" kern="1200"/>
+                          <a:rPr lang="en-US" sz="1800" i="1" kern="1200">
+                            <a:latin typeface="Cambria Math" panose="02040503050406030204" pitchFamily="18" charset="0"/>
+                          </a:rPr>
                         </m:ctrlPr>
                       </m:sSubPr>
                       <m:e>
                         <m:r>
-                          <a:rPr lang="en-US" sz="1800" i="1" kern="1200"/>
+                          <a:rPr lang="en-US" sz="1800" i="1" kern="1200">
+                            <a:latin typeface="Cambria Math" panose="02040503050406030204" pitchFamily="18" charset="0"/>
+                          </a:rPr>
                           <m:t>𝑛</m:t>
                         </m:r>
                       </m:e>
                       <m:sub>
                         <m:r>
-                          <a:rPr lang="en-US" sz="1800" i="1" kern="1200"/>
+                          <a:rPr lang="en-US" sz="1800" i="1" kern="1200">
+                            <a:latin typeface="Cambria Math" panose="02040503050406030204" pitchFamily="18" charset="0"/>
+                          </a:rPr>
                           <m:t>0</m:t>
                         </m:r>
                       </m:sub>
                     </m:sSub>
                     <m:r>
-                      <a:rPr lang="en-US" sz="1800" kern="1200"/>
+                      <a:rPr lang="en-US" sz="1800" kern="1200">
+                        <a:latin typeface="Cambria Math" panose="02040503050406030204" pitchFamily="18" charset="0"/>
+                      </a:rPr>
                       <m:t>≤</m:t>
                     </m:r>
                     <m:r>
                       <m:rPr>
                         <m:sty m:val="p"/>
                       </m:rPr>
-                      <a:rPr lang="en-US" sz="1800" kern="1200"/>
+                      <a:rPr lang="en-US" sz="1800" kern="1200">
+                        <a:latin typeface="Cambria Math" panose="02040503050406030204" pitchFamily="18" charset="0"/>
+                      </a:rPr>
                       <m:t>n</m:t>
                     </m:r>
                   </m:oMath>
@@ -37118,7 +37271,7 @@
             </p:txBody>
           </p:sp>
         </mc:Choice>
-        <mc:Fallback>
+        <mc:Fallback xmlns="">
           <p:sp>
             <p:nvSpPr>
               <p:cNvPr id="19" name="TextBox 18"/>
@@ -37164,8 +37317,8 @@
           </p:sp>
         </mc:Fallback>
       </mc:AlternateContent>
-      <mc:AlternateContent xmlns:mc="http://schemas.openxmlformats.org/markup-compatibility/2006">
-        <mc:Choice xmlns:a14="http://schemas.microsoft.com/office/drawing/2010/main" Requires="a14">
+      <mc:AlternateContent xmlns:mc="http://schemas.openxmlformats.org/markup-compatibility/2006" xmlns:a14="http://schemas.microsoft.com/office/drawing/2010/main">
+        <mc:Choice Requires="a14">
           <p:sp>
             <p:nvSpPr>
               <p:cNvPr id="20" name="TextBox 19"/>
@@ -37218,33 +37371,45 @@
                       <m:rPr>
                         <m:sty m:val="p"/>
                       </m:rPr>
-                      <a:rPr lang="el-GR" sz="1800" kern="1200"/>
+                      <a:rPr lang="el-GR" sz="1800" kern="1200">
+                        <a:latin typeface="Cambria Math" panose="02040503050406030204" pitchFamily="18" charset="0"/>
+                      </a:rPr>
                       <m:t>θ</m:t>
                     </m:r>
                     <m:r>
-                      <a:rPr lang="en-US" sz="1800" kern="1200"/>
+                      <a:rPr lang="en-US" sz="1800" kern="1200">
+                        <a:latin typeface="Cambria Math" panose="02040503050406030204" pitchFamily="18" charset="0"/>
+                      </a:rPr>
                       <m:t>(</m:t>
                     </m:r>
                     <m:r>
                       <m:rPr>
                         <m:sty m:val="p"/>
                       </m:rPr>
-                      <a:rPr lang="en-US" sz="1800" kern="1200"/>
+                      <a:rPr lang="en-US" sz="1800" kern="1200">
+                        <a:latin typeface="Cambria Math" panose="02040503050406030204" pitchFamily="18" charset="0"/>
+                      </a:rPr>
                       <m:t>g</m:t>
                     </m:r>
                     <m:r>
-                      <a:rPr lang="en-US" sz="1800" kern="1200"/>
+                      <a:rPr lang="en-US" sz="1800" kern="1200">
+                        <a:latin typeface="Cambria Math" panose="02040503050406030204" pitchFamily="18" charset="0"/>
+                      </a:rPr>
                       <m:t>(</m:t>
                     </m:r>
                     <m:r>
                       <m:rPr>
                         <m:sty m:val="p"/>
                       </m:rPr>
-                      <a:rPr lang="en-US" sz="1800" kern="1200"/>
+                      <a:rPr lang="en-US" sz="1800" kern="1200">
+                        <a:latin typeface="Cambria Math" panose="02040503050406030204" pitchFamily="18" charset="0"/>
+                      </a:rPr>
                       <m:t>n</m:t>
                     </m:r>
                     <m:r>
-                      <a:rPr lang="en-US" sz="1800" kern="1200"/>
+                      <a:rPr lang="en-US" sz="1800" kern="1200">
+                        <a:latin typeface="Cambria Math" panose="02040503050406030204" pitchFamily="18" charset="0"/>
+                      </a:rPr>
                       <m:t>))</m:t>
                     </m:r>
                   </m:oMath>
@@ -37261,22 +37426,30 @@
                       <m:rPr>
                         <m:sty m:val="p"/>
                       </m:rPr>
-                      <a:rPr lang="en-US" sz="1800" kern="1200"/>
+                      <a:rPr lang="en-US" sz="1800" kern="1200">
+                        <a:latin typeface="Cambria Math" panose="02040503050406030204" pitchFamily="18" charset="0"/>
+                      </a:rPr>
                       <m:t>f</m:t>
                     </m:r>
                     <m:r>
-                      <a:rPr lang="en-US" sz="1800" kern="1200"/>
+                      <a:rPr lang="en-US" sz="1800" kern="1200">
+                        <a:latin typeface="Cambria Math" panose="02040503050406030204" pitchFamily="18" charset="0"/>
+                      </a:rPr>
                       <m:t>(</m:t>
                     </m:r>
                     <m:r>
                       <m:rPr>
                         <m:sty m:val="p"/>
                       </m:rPr>
-                      <a:rPr lang="en-US" sz="1800" kern="1200"/>
+                      <a:rPr lang="en-US" sz="1800" kern="1200">
+                        <a:latin typeface="Cambria Math" panose="02040503050406030204" pitchFamily="18" charset="0"/>
+                      </a:rPr>
                       <m:t>n</m:t>
                     </m:r>
                     <m:r>
-                      <a:rPr lang="en-US" sz="1800" kern="1200"/>
+                      <a:rPr lang="en-US" sz="1800" kern="1200">
+                        <a:latin typeface="Cambria Math" panose="02040503050406030204" pitchFamily="18" charset="0"/>
+                      </a:rPr>
                       <m:t>)</m:t>
                     </m:r>
                   </m:oMath>
@@ -37292,7 +37465,9 @@
                     <m:sSub>
                       <m:sSubPr>
                         <m:ctrlPr>
-                          <a:rPr lang="en-US" sz="1800" i="1" kern="1200"/>
+                          <a:rPr lang="en-US" sz="1800" i="1" kern="1200">
+                            <a:latin typeface="Cambria Math" panose="02040503050406030204" pitchFamily="18" charset="0"/>
+                          </a:rPr>
                         </m:ctrlPr>
                       </m:sSubPr>
                       <m:e>
@@ -37300,13 +37475,17 @@
                           <m:rPr>
                             <m:sty m:val="p"/>
                           </m:rPr>
-                          <a:rPr lang="en-US" sz="1800" kern="1200"/>
+                          <a:rPr lang="en-US" sz="1800" kern="1200">
+                            <a:latin typeface="Cambria Math" panose="02040503050406030204" pitchFamily="18" charset="0"/>
+                          </a:rPr>
                           <m:t>c</m:t>
                         </m:r>
                       </m:e>
                       <m:sub>
                         <m:r>
-                          <a:rPr lang="en-US" sz="1800" kern="1200"/>
+                          <a:rPr lang="en-US" sz="1800" kern="1200">
+                            <a:latin typeface="Cambria Math" panose="02040503050406030204" pitchFamily="18" charset="0"/>
+                          </a:rPr>
                           <m:t>1</m:t>
                         </m:r>
                       </m:sub>
@@ -37324,7 +37503,9 @@
                     <m:sSub>
                       <m:sSubPr>
                         <m:ctrlPr>
-                          <a:rPr lang="en-US" sz="1800" i="1" kern="1200"/>
+                          <a:rPr lang="en-US" sz="1800" i="1" kern="1200">
+                            <a:latin typeface="Cambria Math" panose="02040503050406030204" pitchFamily="18" charset="0"/>
+                          </a:rPr>
                         </m:ctrlPr>
                       </m:sSubPr>
                       <m:e>
@@ -37332,13 +37513,17 @@
                           <m:rPr>
                             <m:sty m:val="p"/>
                           </m:rPr>
-                          <a:rPr lang="en-US" sz="1800" kern="1200"/>
+                          <a:rPr lang="en-US" sz="1800" kern="1200">
+                            <a:latin typeface="Cambria Math" panose="02040503050406030204" pitchFamily="18" charset="0"/>
+                          </a:rPr>
                           <m:t>c</m:t>
                         </m:r>
                       </m:e>
                       <m:sub>
                         <m:r>
-                          <a:rPr lang="en-US" sz="1800" kern="1200"/>
+                          <a:rPr lang="en-US" sz="1800" kern="1200">
+                            <a:latin typeface="Cambria Math" panose="02040503050406030204" pitchFamily="18" charset="0"/>
+                          </a:rPr>
                           <m:t>2</m:t>
                         </m:r>
                       </m:sub>
@@ -37356,22 +37541,30 @@
                     <m:sSub>
                       <m:sSubPr>
                         <m:ctrlPr>
-                          <a:rPr lang="en-US" sz="1800" i="1" kern="1200"/>
+                          <a:rPr lang="en-US" sz="1800" i="1" kern="1200">
+                            <a:latin typeface="Cambria Math" panose="02040503050406030204" pitchFamily="18" charset="0"/>
+                          </a:rPr>
                         </m:ctrlPr>
                       </m:sSubPr>
                       <m:e>
                         <m:r>
-                          <a:rPr lang="en-US" sz="1800" i="1" kern="1200"/>
+                          <a:rPr lang="en-US" sz="1800" i="1" kern="1200">
+                            <a:latin typeface="Cambria Math" panose="02040503050406030204" pitchFamily="18" charset="0"/>
+                          </a:rPr>
                           <m:t> </m:t>
                         </m:r>
                         <m:r>
-                          <a:rPr lang="en-US" sz="1800" i="1" kern="1200"/>
+                          <a:rPr lang="en-US" sz="1800" i="1" kern="1200">
+                            <a:latin typeface="Cambria Math" panose="02040503050406030204" pitchFamily="18" charset="0"/>
+                          </a:rPr>
                           <m:t>𝑛</m:t>
                         </m:r>
                       </m:e>
                       <m:sub>
                         <m:r>
-                          <a:rPr lang="en-US" sz="1800" i="1" kern="1200"/>
+                          <a:rPr lang="en-US" sz="1800" i="1" kern="1200">
+                            <a:latin typeface="Cambria Math" panose="02040503050406030204" pitchFamily="18" charset="0"/>
+                          </a:rPr>
                           <m:t>0</m:t>
                         </m:r>
                       </m:sub>
@@ -37387,106 +37580,144 @@
                 <a14:m>
                   <m:oMath xmlns:m="http://schemas.openxmlformats.org/officeDocument/2006/math">
                     <m:r>
-                      <a:rPr lang="en-US" sz="1800" b="1" i="1" kern="1200"/>
+                      <a:rPr lang="en-US" sz="1800" b="1" i="1" kern="1200">
+                        <a:latin typeface="Cambria Math" panose="02040503050406030204" pitchFamily="18" charset="0"/>
+                      </a:rPr>
                       <m:t>𝟎</m:t>
                     </m:r>
                     <m:r>
-                      <a:rPr lang="en-US" sz="1800" b="1" kern="1200"/>
+                      <a:rPr lang="en-US" sz="1800" b="1" kern="1200">
+                        <a:latin typeface="Cambria Math" panose="02040503050406030204" pitchFamily="18" charset="0"/>
+                      </a:rPr>
                       <m:t>≤</m:t>
                     </m:r>
                     <m:sSub>
                       <m:sSubPr>
                         <m:ctrlPr>
-                          <a:rPr lang="en-US" sz="1800" b="1" i="1" kern="1200"/>
+                          <a:rPr lang="en-US" sz="1800" b="1" i="1" kern="1200">
+                            <a:latin typeface="Cambria Math" panose="02040503050406030204" pitchFamily="18" charset="0"/>
+                          </a:rPr>
                         </m:ctrlPr>
                       </m:sSubPr>
                       <m:e>
                         <m:r>
-                          <a:rPr lang="en-US" sz="1800" b="1" i="1" kern="1200"/>
+                          <a:rPr lang="en-US" sz="1800" b="1" i="1" kern="1200">
+                            <a:latin typeface="Cambria Math" panose="02040503050406030204" pitchFamily="18" charset="0"/>
+                          </a:rPr>
                           <m:t>𝒄</m:t>
                         </m:r>
                       </m:e>
                       <m:sub>
                         <m:r>
-                          <a:rPr lang="en-US" sz="1800" b="1" i="1" kern="1200"/>
+                          <a:rPr lang="en-US" sz="1800" b="1" i="1" kern="1200">
+                            <a:latin typeface="Cambria Math" panose="02040503050406030204" pitchFamily="18" charset="0"/>
+                          </a:rPr>
                           <m:t>𝟏</m:t>
                         </m:r>
                       </m:sub>
                     </m:sSub>
                     <m:r>
-                      <a:rPr lang="en-US" sz="1800" b="1" i="1" kern="1200"/>
+                      <a:rPr lang="en-US" sz="1800" b="1" i="1" kern="1200">
+                        <a:latin typeface="Cambria Math" panose="02040503050406030204" pitchFamily="18" charset="0"/>
+                      </a:rPr>
                       <m:t>𝒈</m:t>
                     </m:r>
                     <m:d>
                       <m:dPr>
                         <m:ctrlPr>
-                          <a:rPr lang="en-US" sz="1800" b="1" i="1" kern="1200"/>
+                          <a:rPr lang="en-US" sz="1800" b="1" i="1" kern="1200">
+                            <a:latin typeface="Cambria Math" panose="02040503050406030204" pitchFamily="18" charset="0"/>
+                          </a:rPr>
                         </m:ctrlPr>
                       </m:dPr>
                       <m:e>
                         <m:r>
-                          <a:rPr lang="en-US" sz="1800" b="1" i="1" kern="1200"/>
+                          <a:rPr lang="en-US" sz="1800" b="1" i="1" kern="1200">
+                            <a:latin typeface="Cambria Math" panose="02040503050406030204" pitchFamily="18" charset="0"/>
+                          </a:rPr>
                           <m:t>𝒏</m:t>
                         </m:r>
                       </m:e>
                     </m:d>
                     <m:r>
-                      <a:rPr lang="en-US" sz="1800" b="1" kern="1200"/>
+                      <a:rPr lang="en-US" sz="1800" b="1" kern="1200">
+                        <a:latin typeface="Cambria Math" panose="02040503050406030204" pitchFamily="18" charset="0"/>
+                      </a:rPr>
                       <m:t>≤</m:t>
                     </m:r>
                     <m:r>
-                      <a:rPr lang="en-US" sz="1800" b="1" i="1" kern="1200"/>
+                      <a:rPr lang="en-US" sz="1800" b="1" i="1" kern="1200">
+                        <a:latin typeface="Cambria Math" panose="02040503050406030204" pitchFamily="18" charset="0"/>
+                      </a:rPr>
                       <m:t>𝒇</m:t>
                     </m:r>
                     <m:d>
                       <m:dPr>
                         <m:ctrlPr>
-                          <a:rPr lang="en-US" sz="1800" b="1" i="1" kern="1200"/>
+                          <a:rPr lang="en-US" sz="1800" b="1" i="1" kern="1200">
+                            <a:latin typeface="Cambria Math" panose="02040503050406030204" pitchFamily="18" charset="0"/>
+                          </a:rPr>
                         </m:ctrlPr>
                       </m:dPr>
                       <m:e>
                         <m:r>
-                          <a:rPr lang="en-US" sz="1800" b="1" i="1" kern="1200"/>
+                          <a:rPr lang="en-US" sz="1800" b="1" i="1" kern="1200">
+                            <a:latin typeface="Cambria Math" panose="02040503050406030204" pitchFamily="18" charset="0"/>
+                          </a:rPr>
                           <m:t>𝒏</m:t>
                         </m:r>
                       </m:e>
                     </m:d>
                     <m:r>
-                      <a:rPr lang="en-US" sz="1800" b="1" kern="1200"/>
+                      <a:rPr lang="en-US" sz="1800" b="1" kern="1200">
+                        <a:latin typeface="Cambria Math" panose="02040503050406030204" pitchFamily="18" charset="0"/>
+                      </a:rPr>
                       <m:t>≤</m:t>
                     </m:r>
                     <m:sSub>
                       <m:sSubPr>
                         <m:ctrlPr>
-                          <a:rPr lang="en-US" sz="1800" b="1" i="1" kern="1200"/>
+                          <a:rPr lang="en-US" sz="1800" b="1" i="1" kern="1200">
+                            <a:latin typeface="Cambria Math" panose="02040503050406030204" pitchFamily="18" charset="0"/>
+                          </a:rPr>
                         </m:ctrlPr>
                       </m:sSubPr>
                       <m:e>
                         <m:r>
-                          <a:rPr lang="en-US" sz="1800" b="1" i="1" kern="1200"/>
+                          <a:rPr lang="en-US" sz="1800" b="1" i="1" kern="1200">
+                            <a:latin typeface="Cambria Math" panose="02040503050406030204" pitchFamily="18" charset="0"/>
+                          </a:rPr>
                           <m:t>𝒄</m:t>
                         </m:r>
                       </m:e>
                       <m:sub>
                         <m:r>
-                          <a:rPr lang="en-US" sz="1800" b="1" i="1" kern="1200"/>
+                          <a:rPr lang="en-US" sz="1800" b="1" i="1" kern="1200">
+                            <a:latin typeface="Cambria Math" panose="02040503050406030204" pitchFamily="18" charset="0"/>
+                          </a:rPr>
                           <m:t>𝟐</m:t>
                         </m:r>
                       </m:sub>
                     </m:sSub>
                     <m:r>
-                      <a:rPr lang="en-US" sz="1800" b="1" i="1" kern="1200"/>
+                      <a:rPr lang="en-US" sz="1800" b="1" i="1" kern="1200">
+                        <a:latin typeface="Cambria Math" panose="02040503050406030204" pitchFamily="18" charset="0"/>
+                      </a:rPr>
                       <m:t>𝒈</m:t>
                     </m:r>
                     <m:d>
                       <m:dPr>
                         <m:ctrlPr>
-                          <a:rPr lang="en-US" sz="1800" b="1" i="1" kern="1200"/>
+                          <a:rPr lang="en-US" sz="1800" b="1" i="1" kern="1200">
+                            <a:latin typeface="Cambria Math" panose="02040503050406030204" pitchFamily="18" charset="0"/>
+                          </a:rPr>
                         </m:ctrlPr>
                       </m:dPr>
                       <m:e>
                         <m:r>
-                          <a:rPr lang="en-US" sz="1800" b="1" i="1" kern="1200"/>
+                          <a:rPr lang="en-US" sz="1800" b="1" i="1" kern="1200">
+                            <a:latin typeface="Cambria Math" panose="02040503050406030204" pitchFamily="18" charset="0"/>
+                          </a:rPr>
                           <m:t>𝒏</m:t>
                         </m:r>
                       </m:e>
@@ -37504,31 +37735,41 @@
                     <m:sSub>
                       <m:sSubPr>
                         <m:ctrlPr>
-                          <a:rPr lang="en-US" sz="1800" i="1" kern="1200"/>
+                          <a:rPr lang="en-US" sz="1800" i="1" kern="1200">
+                            <a:latin typeface="Cambria Math" panose="02040503050406030204" pitchFamily="18" charset="0"/>
+                          </a:rPr>
                         </m:ctrlPr>
                       </m:sSubPr>
                       <m:e>
                         <m:r>
-                          <a:rPr lang="en-US" sz="1800" i="1" kern="1200"/>
+                          <a:rPr lang="en-US" sz="1800" i="1" kern="1200">
+                            <a:latin typeface="Cambria Math" panose="02040503050406030204" pitchFamily="18" charset="0"/>
+                          </a:rPr>
                           <m:t>𝑛</m:t>
                         </m:r>
                       </m:e>
                       <m:sub>
                         <m:r>
-                          <a:rPr lang="en-US" sz="1800" i="1" kern="1200"/>
+                          <a:rPr lang="en-US" sz="1800" i="1" kern="1200">
+                            <a:latin typeface="Cambria Math" panose="02040503050406030204" pitchFamily="18" charset="0"/>
+                          </a:rPr>
                           <m:t>0</m:t>
                         </m:r>
                       </m:sub>
                     </m:sSub>
                     <m:r>
-                      <a:rPr lang="en-US" sz="1800" kern="1200"/>
+                      <a:rPr lang="en-US" sz="1800" kern="1200">
+                        <a:latin typeface="Cambria Math" panose="02040503050406030204" pitchFamily="18" charset="0"/>
+                      </a:rPr>
                       <m:t>≤</m:t>
                     </m:r>
                     <m:r>
                       <m:rPr>
                         <m:sty m:val="p"/>
                       </m:rPr>
-                      <a:rPr lang="en-US" sz="1800" kern="1200"/>
+                      <a:rPr lang="en-US" sz="1800" kern="1200">
+                        <a:latin typeface="Cambria Math" panose="02040503050406030204" pitchFamily="18" charset="0"/>
+                      </a:rPr>
                       <m:t>n</m:t>
                     </m:r>
                   </m:oMath>
@@ -37543,7 +37784,7 @@
             </p:txBody>
           </p:sp>
         </mc:Choice>
-        <mc:Fallback>
+        <mc:Fallback xmlns="">
           <p:sp>
             <p:nvSpPr>
               <p:cNvPr id="20" name="TextBox 19"/>
@@ -37589,8 +37830,8 @@
           </p:sp>
         </mc:Fallback>
       </mc:AlternateContent>
-      <mc:AlternateContent xmlns:mc="http://schemas.openxmlformats.org/markup-compatibility/2006">
-        <mc:Choice xmlns:a14="http://schemas.microsoft.com/office/drawing/2010/main" Requires="a14">
+      <mc:AlternateContent xmlns:mc="http://schemas.openxmlformats.org/markup-compatibility/2006" xmlns:a14="http://schemas.microsoft.com/office/drawing/2010/main">
+        <mc:Choice Requires="a14">
           <p:sp>
             <p:nvSpPr>
               <p:cNvPr id="21" name="TextBox 20"/>
@@ -37734,7 +37975,7 @@
             </p:txBody>
           </p:sp>
         </mc:Choice>
-        <mc:Fallback>
+        <mc:Fallback xmlns="">
           <p:sp>
             <p:nvSpPr>
               <p:cNvPr id="21" name="TextBox 20"/>
@@ -37782,8 +38023,8 @@
           </p:sp>
         </mc:Fallback>
       </mc:AlternateContent>
-      <mc:AlternateContent xmlns:mc="http://schemas.openxmlformats.org/markup-compatibility/2006">
-        <mc:Choice xmlns:a14="http://schemas.microsoft.com/office/drawing/2010/main" Requires="a14">
+      <mc:AlternateContent xmlns:mc="http://schemas.openxmlformats.org/markup-compatibility/2006" xmlns:a14="http://schemas.microsoft.com/office/drawing/2010/main">
+        <mc:Choice Requires="a14">
           <p:sp>
             <p:nvSpPr>
               <p:cNvPr id="22" name="TextBox 21"/>
@@ -37837,51 +38078,71 @@
                     </m:oMathParaPr>
                     <m:oMath xmlns:m="http://schemas.openxmlformats.org/officeDocument/2006/math">
                       <m:r>
-                        <a:rPr lang="en-US" sz="2000" i="0" kern="1200"/>
+                        <a:rPr lang="en-US" sz="2000" i="0" kern="1200">
+                          <a:latin typeface="Cambria Math" panose="02040503050406030204" pitchFamily="18" charset="0"/>
+                        </a:rPr>
                         <m:t>𝐟</m:t>
                       </m:r>
                       <m:d>
                         <m:dPr>
                           <m:ctrlPr>
-                            <a:rPr lang="en-US" sz="2000" i="1" kern="1200"/>
+                            <a:rPr lang="en-US" sz="2000" i="1" kern="1200">
+                              <a:latin typeface="Cambria Math" panose="02040503050406030204" pitchFamily="18" charset="0"/>
+                            </a:rPr>
                           </m:ctrlPr>
                         </m:dPr>
                         <m:e>
                           <m:r>
-                            <a:rPr lang="en-US" sz="2000" i="0" kern="1200"/>
+                            <a:rPr lang="en-US" sz="2000" i="0" kern="1200">
+                              <a:latin typeface="Cambria Math" panose="02040503050406030204" pitchFamily="18" charset="0"/>
+                            </a:rPr>
                             <m:t>𝐧</m:t>
                           </m:r>
                         </m:e>
                       </m:d>
                       <m:r>
-                        <a:rPr lang="en-US" sz="2000" i="0" kern="1200"/>
+                        <a:rPr lang="en-US" sz="2000" i="0" kern="1200">
+                          <a:latin typeface="Cambria Math" panose="02040503050406030204" pitchFamily="18" charset="0"/>
+                        </a:rPr>
                         <m:t>=</m:t>
                       </m:r>
                       <m:r>
                         <m:rPr>
                           <m:sty m:val="p"/>
                         </m:rPr>
-                        <a:rPr lang="el-GR" sz="2000" i="0" kern="1200"/>
+                        <a:rPr lang="el-GR" sz="2000" i="0" kern="1200">
+                          <a:latin typeface="Cambria Math" panose="02040503050406030204" pitchFamily="18" charset="0"/>
+                        </a:rPr>
                         <m:t>Ω</m:t>
                       </m:r>
                       <m:r>
-                        <a:rPr lang="en-US" sz="2000" i="0" kern="1200"/>
+                        <a:rPr lang="en-US" sz="2000" i="0" kern="1200">
+                          <a:latin typeface="Cambria Math" panose="02040503050406030204" pitchFamily="18" charset="0"/>
+                        </a:rPr>
                         <m:t>(</m:t>
                       </m:r>
                       <m:r>
-                        <a:rPr lang="en-US" sz="2000" i="0" kern="1200"/>
+                        <a:rPr lang="en-US" sz="2000" i="0" kern="1200">
+                          <a:latin typeface="Cambria Math" panose="02040503050406030204" pitchFamily="18" charset="0"/>
+                        </a:rPr>
                         <m:t>𝐠</m:t>
                       </m:r>
                       <m:r>
-                        <a:rPr lang="en-US" sz="2000" i="0" kern="1200"/>
+                        <a:rPr lang="en-US" sz="2000" i="0" kern="1200">
+                          <a:latin typeface="Cambria Math" panose="02040503050406030204" pitchFamily="18" charset="0"/>
+                        </a:rPr>
                         <m:t>(</m:t>
                       </m:r>
                       <m:r>
-                        <a:rPr lang="en-US" sz="2000" i="0" kern="1200"/>
+                        <a:rPr lang="en-US" sz="2000" i="0" kern="1200">
+                          <a:latin typeface="Cambria Math" panose="02040503050406030204" pitchFamily="18" charset="0"/>
+                        </a:rPr>
                         <m:t>𝐧</m:t>
                       </m:r>
                       <m:r>
-                        <a:rPr lang="en-US" sz="2000" i="0" kern="1200"/>
+                        <a:rPr lang="en-US" sz="2000" i="0" kern="1200">
+                          <a:latin typeface="Cambria Math" panose="02040503050406030204" pitchFamily="18" charset="0"/>
+                        </a:rPr>
                         <m:t>))</m:t>
                       </m:r>
                     </m:oMath>
@@ -37894,7 +38155,7 @@
             </p:txBody>
           </p:sp>
         </mc:Choice>
-        <mc:Fallback>
+        <mc:Fallback xmlns="">
           <p:sp>
             <p:nvSpPr>
               <p:cNvPr id="22" name="TextBox 21"/>
@@ -37942,8 +38203,8 @@
           </p:sp>
         </mc:Fallback>
       </mc:AlternateContent>
-      <mc:AlternateContent xmlns:mc="http://schemas.openxmlformats.org/markup-compatibility/2006">
-        <mc:Choice xmlns:a14="http://schemas.microsoft.com/office/drawing/2010/main" Requires="a14">
+      <mc:AlternateContent xmlns:mc="http://schemas.openxmlformats.org/markup-compatibility/2006" xmlns:a14="http://schemas.microsoft.com/office/drawing/2010/main">
+        <mc:Choice Requires="a14">
           <p:sp>
             <p:nvSpPr>
               <p:cNvPr id="23" name="TextBox 22"/>
@@ -37997,43 +38258,63 @@
                     </m:oMathParaPr>
                     <m:oMath xmlns:m="http://schemas.openxmlformats.org/officeDocument/2006/math">
                       <m:r>
-                        <a:rPr lang="en-US" sz="2000" i="0" kern="1200"/>
+                        <a:rPr lang="en-US" sz="2000" i="0" kern="1200">
+                          <a:latin typeface="Cambria Math" panose="02040503050406030204" pitchFamily="18" charset="0"/>
+                        </a:rPr>
                         <m:t>𝐟</m:t>
                       </m:r>
                       <m:r>
-                        <a:rPr lang="en-US" sz="2000" i="0" kern="1200"/>
+                        <a:rPr lang="en-US" sz="2000" i="0" kern="1200">
+                          <a:latin typeface="Cambria Math" panose="02040503050406030204" pitchFamily="18" charset="0"/>
+                        </a:rPr>
                         <m:t>(</m:t>
                       </m:r>
                       <m:r>
-                        <a:rPr lang="en-US" sz="2000" i="0" kern="1200"/>
+                        <a:rPr lang="en-US" sz="2000" i="0" kern="1200">
+                          <a:latin typeface="Cambria Math" panose="02040503050406030204" pitchFamily="18" charset="0"/>
+                        </a:rPr>
                         <m:t>𝐧</m:t>
                       </m:r>
                       <m:r>
-                        <a:rPr lang="en-US" sz="2000" i="0" kern="1200"/>
+                        <a:rPr lang="en-US" sz="2000" i="0" kern="1200">
+                          <a:latin typeface="Cambria Math" panose="02040503050406030204" pitchFamily="18" charset="0"/>
+                        </a:rPr>
                         <m:t>)=</m:t>
                       </m:r>
                       <m:r>
-                        <a:rPr lang="en-US" sz="2000" i="0" kern="1200"/>
+                        <a:rPr lang="en-US" sz="2000" i="0" kern="1200">
+                          <a:latin typeface="Cambria Math" panose="02040503050406030204" pitchFamily="18" charset="0"/>
+                        </a:rPr>
                         <m:t>𝛉</m:t>
                       </m:r>
                       <m:r>
-                        <a:rPr lang="en-US" sz="2000" i="0" kern="1200"/>
+                        <a:rPr lang="en-US" sz="2000" i="0" kern="1200">
+                          <a:latin typeface="Cambria Math" panose="02040503050406030204" pitchFamily="18" charset="0"/>
+                        </a:rPr>
                         <m:t>(</m:t>
                       </m:r>
                       <m:r>
-                        <a:rPr lang="en-US" sz="2000" i="0" kern="1200"/>
+                        <a:rPr lang="en-US" sz="2000" i="0" kern="1200">
+                          <a:latin typeface="Cambria Math" panose="02040503050406030204" pitchFamily="18" charset="0"/>
+                        </a:rPr>
                         <m:t>𝐠</m:t>
                       </m:r>
                       <m:r>
-                        <a:rPr lang="en-US" sz="2000" i="0" kern="1200"/>
+                        <a:rPr lang="en-US" sz="2000" i="0" kern="1200">
+                          <a:latin typeface="Cambria Math" panose="02040503050406030204" pitchFamily="18" charset="0"/>
+                        </a:rPr>
                         <m:t>(</m:t>
                       </m:r>
                       <m:r>
-                        <a:rPr lang="en-US" sz="2000" i="0" kern="1200"/>
+                        <a:rPr lang="en-US" sz="2000" i="0" kern="1200">
+                          <a:latin typeface="Cambria Math" panose="02040503050406030204" pitchFamily="18" charset="0"/>
+                        </a:rPr>
                         <m:t>𝐧</m:t>
                       </m:r>
                       <m:r>
-                        <a:rPr lang="en-US" sz="2000" i="0" kern="1200"/>
+                        <a:rPr lang="en-US" sz="2000" i="0" kern="1200">
+                          <a:latin typeface="Cambria Math" panose="02040503050406030204" pitchFamily="18" charset="0"/>
+                        </a:rPr>
                         <m:t>))</m:t>
                       </m:r>
                     </m:oMath>
@@ -38046,7 +38327,7 @@
             </p:txBody>
           </p:sp>
         </mc:Choice>
-        <mc:Fallback>
+        <mc:Fallback xmlns="">
           <p:sp>
             <p:nvSpPr>
               <p:cNvPr id="23" name="TextBox 22"/>
@@ -38226,14 +38507,6 @@
               </a:rPr>
               <a:t>Asymptotic notations – Cases </a:t>
             </a:r>
-            <a:endParaRPr lang="en-US" sz="2800" b="1" kern="1200" spc="-1" dirty="0">
-              <a:solidFill>
-                <a:prstClr val="black"/>
-              </a:solidFill>
-              <a:latin typeface="Trebuchet MS" panose="020B0603020202020204" pitchFamily="34" charset="0"/>
-              <a:ea typeface="Cambria" panose="02040503050406030204" pitchFamily="18" charset="0"/>
-              <a:cs typeface="Calibri" panose="020F0502020204030204" pitchFamily="34" charset="0"/>
-            </a:endParaRPr>
           </a:p>
         </p:txBody>
       </p:sp>
@@ -38267,8 +38540,8 @@
           <a:chExt cx="0" cy="0"/>
         </a:xfrm>
       </p:grpSpPr>
-      <mc:AlternateContent xmlns:mc="http://schemas.openxmlformats.org/markup-compatibility/2006">
-        <mc:Choice xmlns:a14="http://schemas.microsoft.com/office/drawing/2010/main" Requires="a14">
+      <mc:AlternateContent xmlns:mc="http://schemas.openxmlformats.org/markup-compatibility/2006" xmlns:a14="http://schemas.microsoft.com/office/drawing/2010/main">
+        <mc:Choice Requires="a14">
           <p:graphicFrame>
             <p:nvGraphicFramePr>
               <p:cNvPr id="5" name="Table 4"/>
@@ -41854,7 +42127,7 @@
             </a:graphic>
           </p:graphicFrame>
         </mc:Choice>
-        <mc:Fallback>
+        <mc:Fallback xmlns="">
           <p:graphicFrame>
             <p:nvGraphicFramePr>
               <p:cNvPr id="5" name="Table 4"/>
@@ -45154,8 +45427,8 @@
           </a:p>
         </p:txBody>
       </p:sp>
-      <mc:AlternateContent xmlns:mc="http://schemas.openxmlformats.org/markup-compatibility/2006">
-        <mc:Choice xmlns:a14="http://schemas.microsoft.com/office/drawing/2010/main" Requires="a14">
+      <mc:AlternateContent xmlns:mc="http://schemas.openxmlformats.org/markup-compatibility/2006" xmlns:a14="http://schemas.microsoft.com/office/drawing/2010/main">
+        <mc:Choice Requires="a14">
           <p:graphicFrame>
             <p:nvGraphicFramePr>
               <p:cNvPr id="4" name="Table 3">
@@ -45818,7 +46091,7 @@
             </a:graphic>
           </p:graphicFrame>
         </mc:Choice>
-        <mc:Fallback>
+        <mc:Fallback xmlns="">
           <p:graphicFrame>
             <p:nvGraphicFramePr>
               <p:cNvPr id="4" name="Table 3">
@@ -46191,14 +46464,6 @@
               </a:rPr>
               <a:t>Common orders of magnitude</a:t>
             </a:r>
-            <a:endParaRPr lang="en-US" sz="2400" b="1" kern="1200" spc="-1" dirty="0">
-              <a:solidFill>
-                <a:prstClr val="black"/>
-              </a:solidFill>
-              <a:latin typeface="Trebuchet MS" panose="020B0603020202020204" pitchFamily="34" charset="0"/>
-              <a:ea typeface="Cambria" panose="02040503050406030204" pitchFamily="18" charset="0"/>
-              <a:cs typeface="Calibri" panose="020F0502020204030204" pitchFamily="34" charset="0"/>
-            </a:endParaRPr>
           </a:p>
         </p:txBody>
       </p:sp>
@@ -46304,16 +46569,7 @@
                 </a:solidFill>
                 <a:latin typeface="Trebuchet MS" panose="020B0603020202020204" pitchFamily="34" charset="0"/>
               </a:rPr>
-              <a:t>Thank you</a:t>
-            </a:r>
-            <a:r>
-              <a:rPr lang="en-US" sz="4400" b="1" dirty="0" smtClean="0">
-                <a:solidFill>
-                  <a:schemeClr val="tx1"/>
-                </a:solidFill>
-                <a:latin typeface="Trebuchet MS" panose="020B0603020202020204" pitchFamily="34" charset="0"/>
-              </a:rPr>
-              <a:t>!!</a:t>
+              <a:t>Thank you!!</a:t>
             </a:r>
             <a:endParaRPr lang="en-US" sz="4400" b="1" dirty="0">
               <a:solidFill>
@@ -47809,12 +48065,6 @@
               </a:rPr>
               <a:t>Finance</a:t>
             </a:r>
-            <a:endParaRPr lang="en-US" sz="2000" dirty="0" smtClean="0">
-              <a:solidFill>
-                <a:srgbClr val="0070C0"/>
-              </a:solidFill>
-              <a:latin typeface="Trebuchet MS" panose="020B0603020202020204" pitchFamily="34" charset="0"/>
-            </a:endParaRPr>
           </a:p>
           <a:p>
             <a:pPr marL="731838" indent="-285750" algn="just">
@@ -47842,12 +48092,6 @@
               </a:rPr>
               <a:t>Healthcare</a:t>
             </a:r>
-            <a:endParaRPr lang="en-US" sz="2000" dirty="0" smtClean="0">
-              <a:solidFill>
-                <a:srgbClr val="0070C0"/>
-              </a:solidFill>
-              <a:latin typeface="Trebuchet MS" panose="020B0603020202020204" pitchFamily="34" charset="0"/>
-            </a:endParaRPr>
           </a:p>
         </p:txBody>
       </p:sp>
